--- a/fubc-en/2-Above All Powers.pptx
+++ b/fubc-en/2-Above All Powers.pptx
@@ -12,9 +12,10 @@
     <p:sldId id="260" r:id="rId6"/>
     <p:sldId id="261" r:id="rId7"/>
     <p:sldId id="262" r:id="rId8"/>
+    <p:sldId id="263" r:id="rId9"/>
   </p:sldIdLst>
   <p:notesMasterIdLst>
-    <p:notesMasterId r:id="rId9"/>
+    <p:notesMasterId r:id="rId10"/>
   </p:notesMasterIdLst>
   <p:sldSz cx="12192000" cy="6858000"/>
   <p:notesSz cx="6858000" cy="12192000"/>
@@ -1060,6 +1061,94 @@
             <a:fld id="{F7021451-1387-4CA6-816F-3879F97B5CBC}" type="slidenum">
               <a:rPr lang="en-US"/>
               <a:t>7</a:t>
+            </a:fld>
+            <a:endParaRPr lang="en-US"/>
+          </a:p>
+        </p:txBody>
+      </p:sp>
+    </p:spTree>
+    <p:extLst>
+      <p:ext uri="{BB962C8B-B14F-4D97-AF65-F5344CB8AC3E}">
+        <p14:creationId xmlns:p14="http://schemas.microsoft.com/office/powerpoint/2010/main" val="1024086991"/>
+      </p:ext>
+    </p:extLst>
+  </p:cSld>
+  <p:clrMapOvr>
+    <a:masterClrMapping/>
+  </p:clrMapOvr>
+</p:notes>
+</file>
+
+<file path=ppt/notesSlides/notesSlide8.xml><?xml version="1.0" encoding="utf-8"?>
+<p:notes xmlns:a="http://schemas.openxmlformats.org/drawingml/2006/main" xmlns:r="http://schemas.openxmlformats.org/officeDocument/2006/relationships" xmlns:p="http://schemas.openxmlformats.org/presentationml/2006/main">
+  <p:cSld>
+    <p:spTree>
+      <p:nvGrpSpPr>
+        <p:cNvPr id="1" name=""/>
+        <p:cNvGrpSpPr/>
+        <p:nvPr/>
+      </p:nvGrpSpPr>
+      <p:grpSpPr>
+        <a:xfrm>
+          <a:off x="0" y="0"/>
+          <a:ext cx="0" cy="0"/>
+          <a:chOff x="0" y="0"/>
+          <a:chExt cx="0" cy="0"/>
+        </a:xfrm>
+      </p:grpSpPr>
+      <p:sp>
+        <p:nvSpPr>
+          <p:cNvPr id="2" name="Slide Image Placeholder 1"/>
+          <p:cNvSpPr>
+            <a:spLocks noGrp="1" noRot="1" noChangeAspect="1"/>
+          </p:cNvSpPr>
+          <p:nvPr>
+            <p:ph type="sldImg"/>
+          </p:nvPr>
+        </p:nvSpPr>
+        <p:spPr/>
+      </p:sp>
+      <p:sp>
+        <p:nvSpPr>
+          <p:cNvPr id="3" name="Notes Placeholder 2"/>
+          <p:cNvSpPr>
+            <a:spLocks noGrp="1"/>
+          </p:cNvSpPr>
+          <p:nvPr>
+            <p:ph type="body" idx="1"/>
+          </p:nvPr>
+        </p:nvSpPr>
+        <p:spPr/>
+        <p:txBody>
+          <a:bodyPr/>
+          <a:lstStyle/>
+          <a:p>
+            <a:r>
+              <a:rPr lang="en-US" dirty="0"/>
+              <a:t/>
+            </a:r>
+            <a:endParaRPr lang="en-US" dirty="0"/>
+          </a:p>
+        </p:txBody>
+      </p:sp>
+      <p:sp>
+        <p:nvSpPr>
+          <p:cNvPr id="4" name="Slide Number Placeholder 3"/>
+          <p:cNvSpPr>
+            <a:spLocks noGrp="1"/>
+          </p:cNvSpPr>
+          <p:nvPr>
+            <p:ph type="sldNum" sz="quarter" idx="10"/>
+          </p:nvPr>
+        </p:nvSpPr>
+        <p:spPr/>
+        <p:txBody>
+          <a:bodyPr/>
+          <a:lstStyle/>
+          <a:p>
+            <a:fld id="{F7021451-1387-4CA6-816F-3879F97B5CBC}" type="slidenum">
+              <a:rPr lang="en-US"/>
+              <a:t>8</a:t>
             </a:fld>
             <a:endParaRPr lang="en-US"/>
           </a:p>
@@ -1434,68 +1523,17 @@
               <a:buNone/>
             </a:pPr>
             <a:r>
-              <a:rPr lang="en-US" sz="4000" b="1" dirty="0">
-                <a:solidFill>
-                  <a:srgbClr val="FFFFFF"/>
-                </a:solidFill>
-                <a:latin typeface="Arial" pitchFamily="34" charset="0"/>
-                <a:ea typeface="Arial" pitchFamily="34" charset="-122"/>
-                <a:cs typeface="Arial" pitchFamily="34" charset="-120"/>
-              </a:rPr>
-              <a:t>Above all powers, above all kings</a:t>
-            </a:r>
-            <a:endParaRPr lang="en-US" sz="4000" dirty="0"/>
-          </a:p>
-          <a:p>
-            <a:pPr algn="ctr" indent="0" marL="0">
-              <a:buNone/>
-            </a:pPr>
-            <a:r>
-              <a:rPr lang="en-US" sz="4000" b="1" dirty="0">
-                <a:solidFill>
-                  <a:srgbClr val="FFFFFF"/>
-                </a:solidFill>
-                <a:latin typeface="Arial" pitchFamily="34" charset="0"/>
-                <a:ea typeface="Arial" pitchFamily="34" charset="-122"/>
-                <a:cs typeface="Arial" pitchFamily="34" charset="-120"/>
-              </a:rPr>
-              <a:t>Above all nature and all created things</a:t>
-            </a:r>
-            <a:endParaRPr lang="en-US" sz="4000" dirty="0"/>
-          </a:p>
-          <a:p>
-            <a:pPr algn="ctr" indent="0" marL="0">
-              <a:buNone/>
-            </a:pPr>
-            <a:r>
-              <a:rPr lang="en-US" sz="4000" b="1" dirty="0">
-                <a:solidFill>
-                  <a:srgbClr val="FFFFFF"/>
-                </a:solidFill>
-                <a:latin typeface="Arial" pitchFamily="34" charset="0"/>
-                <a:ea typeface="Arial" pitchFamily="34" charset="-122"/>
-                <a:cs typeface="Arial" pitchFamily="34" charset="-120"/>
-              </a:rPr>
-              <a:t>Above all wisdom and all the ways of man.</a:t>
-            </a:r>
-            <a:endParaRPr lang="en-US" sz="4000" dirty="0"/>
-          </a:p>
-          <a:p>
-            <a:pPr algn="ctr" indent="0" marL="0">
-              <a:buNone/>
-            </a:pPr>
-            <a:r>
-              <a:rPr lang="en-US" sz="4000" b="1" dirty="0">
-                <a:solidFill>
-                  <a:srgbClr val="FFFFFF"/>
-                </a:solidFill>
-                <a:latin typeface="Arial" pitchFamily="34" charset="0"/>
-                <a:ea typeface="Arial" pitchFamily="34" charset="-122"/>
-                <a:cs typeface="Arial" pitchFamily="34" charset="-120"/>
-              </a:rPr>
-              <a:t>You were here before the world began.</a:t>
-            </a:r>
-            <a:endParaRPr lang="en-US" sz="4000" dirty="0"/>
+              <a:rPr lang="en-US" sz="4800" b="1" dirty="0">
+                <a:solidFill>
+                  <a:srgbClr val="FFFFFF"/>
+                </a:solidFill>
+                <a:latin typeface="Arial" pitchFamily="34" charset="0"/>
+                <a:ea typeface="Arial" pitchFamily="34" charset="-122"/>
+                <a:cs typeface="Arial" pitchFamily="34" charset="-120"/>
+              </a:rPr>
+              <a:t>Above All Powers</a:t>
+            </a:r>
+            <a:endParaRPr lang="en-US" sz="4800" dirty="0"/>
           </a:p>
         </p:txBody>
       </p:sp>
@@ -1556,68 +1594,68 @@
               <a:buNone/>
             </a:pPr>
             <a:r>
-              <a:rPr lang="en-US" sz="4000" b="1" dirty="0">
-                <a:solidFill>
-                  <a:srgbClr val="FFFFFF"/>
-                </a:solidFill>
-                <a:latin typeface="Arial" pitchFamily="34" charset="0"/>
-                <a:ea typeface="Arial" pitchFamily="34" charset="-122"/>
-                <a:cs typeface="Arial" pitchFamily="34" charset="-120"/>
-              </a:rPr>
-              <a:t>Above all kingdoms, above all thrones</a:t>
-            </a:r>
-            <a:endParaRPr lang="en-US" sz="4000" dirty="0"/>
-          </a:p>
-          <a:p>
-            <a:pPr algn="ctr" indent="0" marL="0">
-              <a:buNone/>
-            </a:pPr>
-            <a:r>
-              <a:rPr lang="en-US" sz="4000" b="1" dirty="0">
-                <a:solidFill>
-                  <a:srgbClr val="FFFFFF"/>
-                </a:solidFill>
-                <a:latin typeface="Arial" pitchFamily="34" charset="0"/>
-                <a:ea typeface="Arial" pitchFamily="34" charset="-122"/>
-                <a:cs typeface="Arial" pitchFamily="34" charset="-120"/>
-              </a:rPr>
-              <a:t>Above all wonders the world has ever known</a:t>
-            </a:r>
-            <a:endParaRPr lang="en-US" sz="4000" dirty="0"/>
-          </a:p>
-          <a:p>
-            <a:pPr algn="ctr" indent="0" marL="0">
-              <a:buNone/>
-            </a:pPr>
-            <a:r>
-              <a:rPr lang="en-US" sz="4000" b="1" dirty="0">
-                <a:solidFill>
-                  <a:srgbClr val="FFFFFF"/>
-                </a:solidFill>
-                <a:latin typeface="Arial" pitchFamily="34" charset="0"/>
-                <a:ea typeface="Arial" pitchFamily="34" charset="-122"/>
-                <a:cs typeface="Arial" pitchFamily="34" charset="-120"/>
-              </a:rPr>
-              <a:t>Above all wealth and treasures of the earth</a:t>
-            </a:r>
-            <a:endParaRPr lang="en-US" sz="4000" dirty="0"/>
-          </a:p>
-          <a:p>
-            <a:pPr algn="ctr" indent="0" marL="0">
-              <a:buNone/>
-            </a:pPr>
-            <a:r>
-              <a:rPr lang="en-US" sz="4000" b="1" dirty="0">
-                <a:solidFill>
-                  <a:srgbClr val="FFFFFF"/>
-                </a:solidFill>
-                <a:latin typeface="Arial" pitchFamily="34" charset="0"/>
-                <a:ea typeface="Arial" pitchFamily="34" charset="-122"/>
-                <a:cs typeface="Arial" pitchFamily="34" charset="-120"/>
-              </a:rPr>
-              <a:t>There’s no way to measure what you're worth</a:t>
-            </a:r>
-            <a:endParaRPr lang="en-US" sz="4000" dirty="0"/>
+              <a:rPr lang="en-US" sz="4800" b="1" dirty="0">
+                <a:solidFill>
+                  <a:srgbClr val="FFFFFF"/>
+                </a:solidFill>
+                <a:latin typeface="Arial" pitchFamily="34" charset="0"/>
+                <a:ea typeface="Arial" pitchFamily="34" charset="-122"/>
+                <a:cs typeface="Arial" pitchFamily="34" charset="-120"/>
+              </a:rPr>
+              <a:t>Above all powers, above all kings</a:t>
+            </a:r>
+            <a:endParaRPr lang="en-US" sz="4800" dirty="0"/>
+          </a:p>
+          <a:p>
+            <a:pPr algn="ctr" indent="0" marL="0">
+              <a:buNone/>
+            </a:pPr>
+            <a:r>
+              <a:rPr lang="en-US" sz="4800" b="1" dirty="0">
+                <a:solidFill>
+                  <a:srgbClr val="FFFFFF"/>
+                </a:solidFill>
+                <a:latin typeface="Arial" pitchFamily="34" charset="0"/>
+                <a:ea typeface="Arial" pitchFamily="34" charset="-122"/>
+                <a:cs typeface="Arial" pitchFamily="34" charset="-120"/>
+              </a:rPr>
+              <a:t>Above all nature and all created things</a:t>
+            </a:r>
+            <a:endParaRPr lang="en-US" sz="4800" dirty="0"/>
+          </a:p>
+          <a:p>
+            <a:pPr algn="ctr" indent="0" marL="0">
+              <a:buNone/>
+            </a:pPr>
+            <a:r>
+              <a:rPr lang="en-US" sz="4800" b="1" dirty="0">
+                <a:solidFill>
+                  <a:srgbClr val="FFFFFF"/>
+                </a:solidFill>
+                <a:latin typeface="Arial" pitchFamily="34" charset="0"/>
+                <a:ea typeface="Arial" pitchFamily="34" charset="-122"/>
+                <a:cs typeface="Arial" pitchFamily="34" charset="-120"/>
+              </a:rPr>
+              <a:t>Above all wisdom and all the ways of man.</a:t>
+            </a:r>
+            <a:endParaRPr lang="en-US" sz="4800" dirty="0"/>
+          </a:p>
+          <a:p>
+            <a:pPr algn="ctr" indent="0" marL="0">
+              <a:buNone/>
+            </a:pPr>
+            <a:r>
+              <a:rPr lang="en-US" sz="4800" b="1" dirty="0">
+                <a:solidFill>
+                  <a:srgbClr val="FFFFFF"/>
+                </a:solidFill>
+                <a:latin typeface="Arial" pitchFamily="34" charset="0"/>
+                <a:ea typeface="Arial" pitchFamily="34" charset="-122"/>
+                <a:cs typeface="Arial" pitchFamily="34" charset="-120"/>
+              </a:rPr>
+              <a:t>You were here before the world began.</a:t>
+            </a:r>
+            <a:endParaRPr lang="en-US" sz="4800" dirty="0"/>
           </a:p>
         </p:txBody>
       </p:sp>
@@ -1678,68 +1716,68 @@
               <a:buNone/>
             </a:pPr>
             <a:r>
-              <a:rPr lang="en-US" sz="4000" b="1" i="1" dirty="0">
-                <a:solidFill>
-                  <a:srgbClr val="FFFFFF"/>
-                </a:solidFill>
-                <a:latin typeface="Arial" pitchFamily="34" charset="0"/>
-                <a:ea typeface="Arial" pitchFamily="34" charset="-122"/>
-                <a:cs typeface="Arial" pitchFamily="34" charset="-120"/>
-              </a:rPr>
-              <a:t>CRUCIFIED, laid behind the stone</a:t>
-            </a:r>
-            <a:endParaRPr lang="en-US" sz="4000" dirty="0"/>
-          </a:p>
-          <a:p>
-            <a:pPr algn="ctr" indent="0" marL="0">
-              <a:buNone/>
-            </a:pPr>
-            <a:r>
-              <a:rPr lang="en-US" sz="4000" b="1" i="1" dirty="0">
-                <a:solidFill>
-                  <a:srgbClr val="FFFFFF"/>
-                </a:solidFill>
-                <a:latin typeface="Arial" pitchFamily="34" charset="0"/>
-                <a:ea typeface="Arial" pitchFamily="34" charset="-122"/>
-                <a:cs typeface="Arial" pitchFamily="34" charset="-120"/>
-              </a:rPr>
-              <a:t>You lived to die, rejected and alone</a:t>
-            </a:r>
-            <a:endParaRPr lang="en-US" sz="4000" dirty="0"/>
-          </a:p>
-          <a:p>
-            <a:pPr algn="ctr" indent="0" marL="0">
-              <a:buNone/>
-            </a:pPr>
-            <a:r>
-              <a:rPr lang="en-US" sz="4000" b="1" i="1" dirty="0">
-                <a:solidFill>
-                  <a:srgbClr val="FFFFFF"/>
-                </a:solidFill>
-                <a:latin typeface="Arial" pitchFamily="34" charset="0"/>
-                <a:ea typeface="Arial" pitchFamily="34" charset="-122"/>
-                <a:cs typeface="Arial" pitchFamily="34" charset="-120"/>
-              </a:rPr>
-              <a:t>Like a rose, trampled on the ground</a:t>
-            </a:r>
-            <a:endParaRPr lang="en-US" sz="4000" dirty="0"/>
-          </a:p>
-          <a:p>
-            <a:pPr algn="ctr" indent="0" marL="0">
-              <a:buNone/>
-            </a:pPr>
-            <a:r>
-              <a:rPr lang="en-US" sz="4000" b="1" i="1" dirty="0">
-                <a:solidFill>
-                  <a:srgbClr val="FFFFFF"/>
-                </a:solidFill>
-                <a:latin typeface="Arial" pitchFamily="34" charset="0"/>
-                <a:ea typeface="Arial" pitchFamily="34" charset="-122"/>
-                <a:cs typeface="Arial" pitchFamily="34" charset="-120"/>
-              </a:rPr>
-              <a:t>You took the fall, and thought of me above all</a:t>
-            </a:r>
-            <a:endParaRPr lang="en-US" sz="4000" dirty="0"/>
+              <a:rPr lang="en-US" sz="4800" b="1" dirty="0">
+                <a:solidFill>
+                  <a:srgbClr val="FFFFFF"/>
+                </a:solidFill>
+                <a:latin typeface="Arial" pitchFamily="34" charset="0"/>
+                <a:ea typeface="Arial" pitchFamily="34" charset="-122"/>
+                <a:cs typeface="Arial" pitchFamily="34" charset="-120"/>
+              </a:rPr>
+              <a:t>Above all kingdoms, above all thrones</a:t>
+            </a:r>
+            <a:endParaRPr lang="en-US" sz="4800" dirty="0"/>
+          </a:p>
+          <a:p>
+            <a:pPr algn="ctr" indent="0" marL="0">
+              <a:buNone/>
+            </a:pPr>
+            <a:r>
+              <a:rPr lang="en-US" sz="4800" b="1" dirty="0">
+                <a:solidFill>
+                  <a:srgbClr val="FFFFFF"/>
+                </a:solidFill>
+                <a:latin typeface="Arial" pitchFamily="34" charset="0"/>
+                <a:ea typeface="Arial" pitchFamily="34" charset="-122"/>
+                <a:cs typeface="Arial" pitchFamily="34" charset="-120"/>
+              </a:rPr>
+              <a:t>Above all wonders the world has ever known</a:t>
+            </a:r>
+            <a:endParaRPr lang="en-US" sz="4800" dirty="0"/>
+          </a:p>
+          <a:p>
+            <a:pPr algn="ctr" indent="0" marL="0">
+              <a:buNone/>
+            </a:pPr>
+            <a:r>
+              <a:rPr lang="en-US" sz="4800" b="1" dirty="0">
+                <a:solidFill>
+                  <a:srgbClr val="FFFFFF"/>
+                </a:solidFill>
+                <a:latin typeface="Arial" pitchFamily="34" charset="0"/>
+                <a:ea typeface="Arial" pitchFamily="34" charset="-122"/>
+                <a:cs typeface="Arial" pitchFamily="34" charset="-120"/>
+              </a:rPr>
+              <a:t>Above all wealth and treasures of the earth</a:t>
+            </a:r>
+            <a:endParaRPr lang="en-US" sz="4800" dirty="0"/>
+          </a:p>
+          <a:p>
+            <a:pPr algn="ctr" indent="0" marL="0">
+              <a:buNone/>
+            </a:pPr>
+            <a:r>
+              <a:rPr lang="en-US" sz="4800" b="1" dirty="0">
+                <a:solidFill>
+                  <a:srgbClr val="FFFFFF"/>
+                </a:solidFill>
+                <a:latin typeface="Arial" pitchFamily="34" charset="0"/>
+                <a:ea typeface="Arial" pitchFamily="34" charset="-122"/>
+                <a:cs typeface="Arial" pitchFamily="34" charset="-120"/>
+              </a:rPr>
+              <a:t>There’s no way to measure what you're worth</a:t>
+            </a:r>
+            <a:endParaRPr lang="en-US" sz="4800" dirty="0"/>
           </a:p>
         </p:txBody>
       </p:sp>
@@ -1800,68 +1838,68 @@
               <a:buNone/>
             </a:pPr>
             <a:r>
-              <a:rPr lang="en-US" sz="4000" b="1" dirty="0">
-                <a:solidFill>
-                  <a:srgbClr val="FFFFFF"/>
-                </a:solidFill>
-                <a:latin typeface="Arial" pitchFamily="34" charset="0"/>
-                <a:ea typeface="Arial" pitchFamily="34" charset="-122"/>
-                <a:cs typeface="Arial" pitchFamily="34" charset="-120"/>
-              </a:rPr>
-              <a:t>Above all powers, above all kings</a:t>
-            </a:r>
-            <a:endParaRPr lang="en-US" sz="4000" dirty="0"/>
-          </a:p>
-          <a:p>
-            <a:pPr algn="ctr" indent="0" marL="0">
-              <a:buNone/>
-            </a:pPr>
-            <a:r>
-              <a:rPr lang="en-US" sz="4000" b="1" dirty="0">
-                <a:solidFill>
-                  <a:srgbClr val="FFFFFF"/>
-                </a:solidFill>
-                <a:latin typeface="Arial" pitchFamily="34" charset="0"/>
-                <a:ea typeface="Arial" pitchFamily="34" charset="-122"/>
-                <a:cs typeface="Arial" pitchFamily="34" charset="-120"/>
-              </a:rPr>
-              <a:t>Above all nature and all created things</a:t>
-            </a:r>
-            <a:endParaRPr lang="en-US" sz="4000" dirty="0"/>
-          </a:p>
-          <a:p>
-            <a:pPr algn="ctr" indent="0" marL="0">
-              <a:buNone/>
-            </a:pPr>
-            <a:r>
-              <a:rPr lang="en-US" sz="4000" b="1" dirty="0">
-                <a:solidFill>
-                  <a:srgbClr val="FFFFFF"/>
-                </a:solidFill>
-                <a:latin typeface="Arial" pitchFamily="34" charset="0"/>
-                <a:ea typeface="Arial" pitchFamily="34" charset="-122"/>
-                <a:cs typeface="Arial" pitchFamily="34" charset="-120"/>
-              </a:rPr>
-              <a:t>Above all wisdom and all the ways of man.</a:t>
-            </a:r>
-            <a:endParaRPr lang="en-US" sz="4000" dirty="0"/>
-          </a:p>
-          <a:p>
-            <a:pPr algn="ctr" indent="0" marL="0">
-              <a:buNone/>
-            </a:pPr>
-            <a:r>
-              <a:rPr lang="en-US" sz="4000" b="1" dirty="0">
-                <a:solidFill>
-                  <a:srgbClr val="FFFFFF"/>
-                </a:solidFill>
-                <a:latin typeface="Arial" pitchFamily="34" charset="0"/>
-                <a:ea typeface="Arial" pitchFamily="34" charset="-122"/>
-                <a:cs typeface="Arial" pitchFamily="34" charset="-120"/>
-              </a:rPr>
-              <a:t>You were here before the world began.</a:t>
-            </a:r>
-            <a:endParaRPr lang="en-US" sz="4000" dirty="0"/>
+              <a:rPr lang="en-US" sz="4800" b="1" i="1" dirty="0">
+                <a:solidFill>
+                  <a:srgbClr val="FFFFFF"/>
+                </a:solidFill>
+                <a:latin typeface="Arial" pitchFamily="34" charset="0"/>
+                <a:ea typeface="Arial" pitchFamily="34" charset="-122"/>
+                <a:cs typeface="Arial" pitchFamily="34" charset="-120"/>
+              </a:rPr>
+              <a:t>CRUCIFIED, laid behind the stone</a:t>
+            </a:r>
+            <a:endParaRPr lang="en-US" sz="4800" dirty="0"/>
+          </a:p>
+          <a:p>
+            <a:pPr algn="ctr" indent="0" marL="0">
+              <a:buNone/>
+            </a:pPr>
+            <a:r>
+              <a:rPr lang="en-US" sz="4800" b="1" i="1" dirty="0">
+                <a:solidFill>
+                  <a:srgbClr val="FFFFFF"/>
+                </a:solidFill>
+                <a:latin typeface="Arial" pitchFamily="34" charset="0"/>
+                <a:ea typeface="Arial" pitchFamily="34" charset="-122"/>
+                <a:cs typeface="Arial" pitchFamily="34" charset="-120"/>
+              </a:rPr>
+              <a:t>You lived to die, rejected and alone</a:t>
+            </a:r>
+            <a:endParaRPr lang="en-US" sz="4800" dirty="0"/>
+          </a:p>
+          <a:p>
+            <a:pPr algn="ctr" indent="0" marL="0">
+              <a:buNone/>
+            </a:pPr>
+            <a:r>
+              <a:rPr lang="en-US" sz="4800" b="1" i="1" dirty="0">
+                <a:solidFill>
+                  <a:srgbClr val="FFFFFF"/>
+                </a:solidFill>
+                <a:latin typeface="Arial" pitchFamily="34" charset="0"/>
+                <a:ea typeface="Arial" pitchFamily="34" charset="-122"/>
+                <a:cs typeface="Arial" pitchFamily="34" charset="-120"/>
+              </a:rPr>
+              <a:t>Like a rose, trampled on the ground</a:t>
+            </a:r>
+            <a:endParaRPr lang="en-US" sz="4800" dirty="0"/>
+          </a:p>
+          <a:p>
+            <a:pPr algn="ctr" indent="0" marL="0">
+              <a:buNone/>
+            </a:pPr>
+            <a:r>
+              <a:rPr lang="en-US" sz="4800" b="1" i="1" dirty="0">
+                <a:solidFill>
+                  <a:srgbClr val="FFFFFF"/>
+                </a:solidFill>
+                <a:latin typeface="Arial" pitchFamily="34" charset="0"/>
+                <a:ea typeface="Arial" pitchFamily="34" charset="-122"/>
+                <a:cs typeface="Arial" pitchFamily="34" charset="-120"/>
+              </a:rPr>
+              <a:t>You took the fall, and thought of me above all</a:t>
+            </a:r>
+            <a:endParaRPr lang="en-US" sz="4800" dirty="0"/>
           </a:p>
         </p:txBody>
       </p:sp>
@@ -1922,68 +1960,68 @@
               <a:buNone/>
             </a:pPr>
             <a:r>
-              <a:rPr lang="en-US" sz="4000" b="1" dirty="0">
-                <a:solidFill>
-                  <a:srgbClr val="FFFFFF"/>
-                </a:solidFill>
-                <a:latin typeface="Arial" pitchFamily="34" charset="0"/>
-                <a:ea typeface="Arial" pitchFamily="34" charset="-122"/>
-                <a:cs typeface="Arial" pitchFamily="34" charset="-120"/>
-              </a:rPr>
-              <a:t>Above all kingdoms, above all thrones</a:t>
-            </a:r>
-            <a:endParaRPr lang="en-US" sz="4000" dirty="0"/>
-          </a:p>
-          <a:p>
-            <a:pPr algn="ctr" indent="0" marL="0">
-              <a:buNone/>
-            </a:pPr>
-            <a:r>
-              <a:rPr lang="en-US" sz="4000" b="1" dirty="0">
-                <a:solidFill>
-                  <a:srgbClr val="FFFFFF"/>
-                </a:solidFill>
-                <a:latin typeface="Arial" pitchFamily="34" charset="0"/>
-                <a:ea typeface="Arial" pitchFamily="34" charset="-122"/>
-                <a:cs typeface="Arial" pitchFamily="34" charset="-120"/>
-              </a:rPr>
-              <a:t>Above all wonders the world has ever known</a:t>
-            </a:r>
-            <a:endParaRPr lang="en-US" sz="4000" dirty="0"/>
-          </a:p>
-          <a:p>
-            <a:pPr algn="ctr" indent="0" marL="0">
-              <a:buNone/>
-            </a:pPr>
-            <a:r>
-              <a:rPr lang="en-US" sz="4000" b="1" dirty="0">
-                <a:solidFill>
-                  <a:srgbClr val="FFFFFF"/>
-                </a:solidFill>
-                <a:latin typeface="Arial" pitchFamily="34" charset="0"/>
-                <a:ea typeface="Arial" pitchFamily="34" charset="-122"/>
-                <a:cs typeface="Arial" pitchFamily="34" charset="-120"/>
-              </a:rPr>
-              <a:t>Above all wealth and treasures of the earth</a:t>
-            </a:r>
-            <a:endParaRPr lang="en-US" sz="4000" dirty="0"/>
-          </a:p>
-          <a:p>
-            <a:pPr algn="ctr" indent="0" marL="0">
-              <a:buNone/>
-            </a:pPr>
-            <a:r>
-              <a:rPr lang="en-US" sz="4000" b="1" dirty="0">
-                <a:solidFill>
-                  <a:srgbClr val="FFFFFF"/>
-                </a:solidFill>
-                <a:latin typeface="Arial" pitchFamily="34" charset="0"/>
-                <a:ea typeface="Arial" pitchFamily="34" charset="-122"/>
-                <a:cs typeface="Arial" pitchFamily="34" charset="-120"/>
-              </a:rPr>
-              <a:t>There’s no way to measure what you're worth</a:t>
-            </a:r>
-            <a:endParaRPr lang="en-US" sz="4000" dirty="0"/>
+              <a:rPr lang="en-US" sz="4800" b="1" dirty="0">
+                <a:solidFill>
+                  <a:srgbClr val="FFFFFF"/>
+                </a:solidFill>
+                <a:latin typeface="Arial" pitchFamily="34" charset="0"/>
+                <a:ea typeface="Arial" pitchFamily="34" charset="-122"/>
+                <a:cs typeface="Arial" pitchFamily="34" charset="-120"/>
+              </a:rPr>
+              <a:t>Above all powers, above all kings</a:t>
+            </a:r>
+            <a:endParaRPr lang="en-US" sz="4800" dirty="0"/>
+          </a:p>
+          <a:p>
+            <a:pPr algn="ctr" indent="0" marL="0">
+              <a:buNone/>
+            </a:pPr>
+            <a:r>
+              <a:rPr lang="en-US" sz="4800" b="1" dirty="0">
+                <a:solidFill>
+                  <a:srgbClr val="FFFFFF"/>
+                </a:solidFill>
+                <a:latin typeface="Arial" pitchFamily="34" charset="0"/>
+                <a:ea typeface="Arial" pitchFamily="34" charset="-122"/>
+                <a:cs typeface="Arial" pitchFamily="34" charset="-120"/>
+              </a:rPr>
+              <a:t>Above all nature and all created things</a:t>
+            </a:r>
+            <a:endParaRPr lang="en-US" sz="4800" dirty="0"/>
+          </a:p>
+          <a:p>
+            <a:pPr algn="ctr" indent="0" marL="0">
+              <a:buNone/>
+            </a:pPr>
+            <a:r>
+              <a:rPr lang="en-US" sz="4800" b="1" dirty="0">
+                <a:solidFill>
+                  <a:srgbClr val="FFFFFF"/>
+                </a:solidFill>
+                <a:latin typeface="Arial" pitchFamily="34" charset="0"/>
+                <a:ea typeface="Arial" pitchFamily="34" charset="-122"/>
+                <a:cs typeface="Arial" pitchFamily="34" charset="-120"/>
+              </a:rPr>
+              <a:t>Above all wisdom and all the ways of man.</a:t>
+            </a:r>
+            <a:endParaRPr lang="en-US" sz="4800" dirty="0"/>
+          </a:p>
+          <a:p>
+            <a:pPr algn="ctr" indent="0" marL="0">
+              <a:buNone/>
+            </a:pPr>
+            <a:r>
+              <a:rPr lang="en-US" sz="4800" b="1" dirty="0">
+                <a:solidFill>
+                  <a:srgbClr val="FFFFFF"/>
+                </a:solidFill>
+                <a:latin typeface="Arial" pitchFamily="34" charset="0"/>
+                <a:ea typeface="Arial" pitchFamily="34" charset="-122"/>
+                <a:cs typeface="Arial" pitchFamily="34" charset="-120"/>
+              </a:rPr>
+              <a:t>You were here before the world began.</a:t>
+            </a:r>
+            <a:endParaRPr lang="en-US" sz="4800" dirty="0"/>
           </a:p>
         </p:txBody>
       </p:sp>
@@ -2044,68 +2082,68 @@
               <a:buNone/>
             </a:pPr>
             <a:r>
-              <a:rPr lang="en-US" sz="4000" b="1" i="1" dirty="0">
-                <a:solidFill>
-                  <a:srgbClr val="FFFFFF"/>
-                </a:solidFill>
-                <a:latin typeface="Arial" pitchFamily="34" charset="0"/>
-                <a:ea typeface="Arial" pitchFamily="34" charset="-122"/>
-                <a:cs typeface="Arial" pitchFamily="34" charset="-120"/>
-              </a:rPr>
-              <a:t>CRUCIFIED, laid behind the stone</a:t>
-            </a:r>
-            <a:endParaRPr lang="en-US" sz="4000" dirty="0"/>
-          </a:p>
-          <a:p>
-            <a:pPr algn="ctr" indent="0" marL="0">
-              <a:buNone/>
-            </a:pPr>
-            <a:r>
-              <a:rPr lang="en-US" sz="4000" b="1" i="1" dirty="0">
-                <a:solidFill>
-                  <a:srgbClr val="FFFFFF"/>
-                </a:solidFill>
-                <a:latin typeface="Arial" pitchFamily="34" charset="0"/>
-                <a:ea typeface="Arial" pitchFamily="34" charset="-122"/>
-                <a:cs typeface="Arial" pitchFamily="34" charset="-120"/>
-              </a:rPr>
-              <a:t>You lived to die, rejected and alone</a:t>
-            </a:r>
-            <a:endParaRPr lang="en-US" sz="4000" dirty="0"/>
-          </a:p>
-          <a:p>
-            <a:pPr algn="ctr" indent="0" marL="0">
-              <a:buNone/>
-            </a:pPr>
-            <a:r>
-              <a:rPr lang="en-US" sz="4000" b="1" i="1" dirty="0">
-                <a:solidFill>
-                  <a:srgbClr val="FFFFFF"/>
-                </a:solidFill>
-                <a:latin typeface="Arial" pitchFamily="34" charset="0"/>
-                <a:ea typeface="Arial" pitchFamily="34" charset="-122"/>
-                <a:cs typeface="Arial" pitchFamily="34" charset="-120"/>
-              </a:rPr>
-              <a:t>Like a rose, trampled on the ground</a:t>
-            </a:r>
-            <a:endParaRPr lang="en-US" sz="4000" dirty="0"/>
-          </a:p>
-          <a:p>
-            <a:pPr algn="ctr" indent="0" marL="0">
-              <a:buNone/>
-            </a:pPr>
-            <a:r>
-              <a:rPr lang="en-US" sz="4000" b="1" i="1" dirty="0">
-                <a:solidFill>
-                  <a:srgbClr val="FFFFFF"/>
-                </a:solidFill>
-                <a:latin typeface="Arial" pitchFamily="34" charset="0"/>
-                <a:ea typeface="Arial" pitchFamily="34" charset="-122"/>
-                <a:cs typeface="Arial" pitchFamily="34" charset="-120"/>
-              </a:rPr>
-              <a:t>You took the fall, and thought of me above all</a:t>
-            </a:r>
-            <a:endParaRPr lang="en-US" sz="4000" dirty="0"/>
+              <a:rPr lang="en-US" sz="4800" b="1" dirty="0">
+                <a:solidFill>
+                  <a:srgbClr val="FFFFFF"/>
+                </a:solidFill>
+                <a:latin typeface="Arial" pitchFamily="34" charset="0"/>
+                <a:ea typeface="Arial" pitchFamily="34" charset="-122"/>
+                <a:cs typeface="Arial" pitchFamily="34" charset="-120"/>
+              </a:rPr>
+              <a:t>Above all kingdoms, above all thrones</a:t>
+            </a:r>
+            <a:endParaRPr lang="en-US" sz="4800" dirty="0"/>
+          </a:p>
+          <a:p>
+            <a:pPr algn="ctr" indent="0" marL="0">
+              <a:buNone/>
+            </a:pPr>
+            <a:r>
+              <a:rPr lang="en-US" sz="4800" b="1" dirty="0">
+                <a:solidFill>
+                  <a:srgbClr val="FFFFFF"/>
+                </a:solidFill>
+                <a:latin typeface="Arial" pitchFamily="34" charset="0"/>
+                <a:ea typeface="Arial" pitchFamily="34" charset="-122"/>
+                <a:cs typeface="Arial" pitchFamily="34" charset="-120"/>
+              </a:rPr>
+              <a:t>Above all wonders the world has ever known</a:t>
+            </a:r>
+            <a:endParaRPr lang="en-US" sz="4800" dirty="0"/>
+          </a:p>
+          <a:p>
+            <a:pPr algn="ctr" indent="0" marL="0">
+              <a:buNone/>
+            </a:pPr>
+            <a:r>
+              <a:rPr lang="en-US" sz="4800" b="1" dirty="0">
+                <a:solidFill>
+                  <a:srgbClr val="FFFFFF"/>
+                </a:solidFill>
+                <a:latin typeface="Arial" pitchFamily="34" charset="0"/>
+                <a:ea typeface="Arial" pitchFamily="34" charset="-122"/>
+                <a:cs typeface="Arial" pitchFamily="34" charset="-120"/>
+              </a:rPr>
+              <a:t>Above all wealth and treasures of the earth</a:t>
+            </a:r>
+            <a:endParaRPr lang="en-US" sz="4800" dirty="0"/>
+          </a:p>
+          <a:p>
+            <a:pPr algn="ctr" indent="0" marL="0">
+              <a:buNone/>
+            </a:pPr>
+            <a:r>
+              <a:rPr lang="en-US" sz="4800" b="1" dirty="0">
+                <a:solidFill>
+                  <a:srgbClr val="FFFFFF"/>
+                </a:solidFill>
+                <a:latin typeface="Arial" pitchFamily="34" charset="0"/>
+                <a:ea typeface="Arial" pitchFamily="34" charset="-122"/>
+                <a:cs typeface="Arial" pitchFamily="34" charset="-120"/>
+              </a:rPr>
+              <a:t>There’s no way to measure what you're worth</a:t>
+            </a:r>
+            <a:endParaRPr lang="en-US" sz="4800" dirty="0"/>
           </a:p>
         </p:txBody>
       </p:sp>
@@ -2166,7 +2204,7 @@
               <a:buNone/>
             </a:pPr>
             <a:r>
-              <a:rPr lang="en-US" sz="4000" b="1" i="1" dirty="0">
+              <a:rPr lang="en-US" sz="4800" b="1" i="1" dirty="0">
                 <a:solidFill>
                   <a:srgbClr val="FFFFFF"/>
                 </a:solidFill>
@@ -2176,14 +2214,14 @@
               </a:rPr>
               <a:t>CRUCIFIED, laid behind the stone</a:t>
             </a:r>
-            <a:endParaRPr lang="en-US" sz="4000" dirty="0"/>
-          </a:p>
-          <a:p>
-            <a:pPr algn="ctr" indent="0" marL="0">
-              <a:buNone/>
-            </a:pPr>
-            <a:r>
-              <a:rPr lang="en-US" sz="4000" b="1" i="1" dirty="0">
+            <a:endParaRPr lang="en-US" sz="4800" dirty="0"/>
+          </a:p>
+          <a:p>
+            <a:pPr algn="ctr" indent="0" marL="0">
+              <a:buNone/>
+            </a:pPr>
+            <a:r>
+              <a:rPr lang="en-US" sz="4800" b="1" i="1" dirty="0">
                 <a:solidFill>
                   <a:srgbClr val="FFFFFF"/>
                 </a:solidFill>
@@ -2193,14 +2231,14 @@
               </a:rPr>
               <a:t>You lived to die, rejected and alone</a:t>
             </a:r>
-            <a:endParaRPr lang="en-US" sz="4000" dirty="0"/>
-          </a:p>
-          <a:p>
-            <a:pPr algn="ctr" indent="0" marL="0">
-              <a:buNone/>
-            </a:pPr>
-            <a:r>
-              <a:rPr lang="en-US" sz="4000" b="1" i="1" dirty="0">
+            <a:endParaRPr lang="en-US" sz="4800" dirty="0"/>
+          </a:p>
+          <a:p>
+            <a:pPr algn="ctr" indent="0" marL="0">
+              <a:buNone/>
+            </a:pPr>
+            <a:r>
+              <a:rPr lang="en-US" sz="4800" b="1" i="1" dirty="0">
                 <a:solidFill>
                   <a:srgbClr val="FFFFFF"/>
                 </a:solidFill>
@@ -2210,14 +2248,14 @@
               </a:rPr>
               <a:t>Like a rose, trampled on the ground</a:t>
             </a:r>
-            <a:endParaRPr lang="en-US" sz="4000" dirty="0"/>
-          </a:p>
-          <a:p>
-            <a:pPr algn="ctr" indent="0" marL="0">
-              <a:buNone/>
-            </a:pPr>
-            <a:r>
-              <a:rPr lang="en-US" sz="4000" b="1" i="1" dirty="0">
+            <a:endParaRPr lang="en-US" sz="4800" dirty="0"/>
+          </a:p>
+          <a:p>
+            <a:pPr algn="ctr" indent="0" marL="0">
+              <a:buNone/>
+            </a:pPr>
+            <a:r>
+              <a:rPr lang="en-US" sz="4800" b="1" i="1" dirty="0">
                 <a:solidFill>
                   <a:srgbClr val="FFFFFF"/>
                 </a:solidFill>
@@ -2227,14 +2265,136 @@
               </a:rPr>
               <a:t>You took the fall, and thought of me above all</a:t>
             </a:r>
-            <a:endParaRPr lang="en-US" sz="4000" dirty="0"/>
-          </a:p>
-          <a:p>
-            <a:pPr algn="ctr" indent="0" marL="0">
-              <a:buNone/>
-            </a:pPr>
-            <a:r>
-              <a:rPr lang="en-US" sz="4000" b="1" i="1" dirty="0">
+            <a:endParaRPr lang="en-US" sz="4800" dirty="0"/>
+          </a:p>
+        </p:txBody>
+      </p:sp>
+    </p:spTree>
+  </p:cSld>
+  <p:clrMapOvr>
+    <a:masterClrMapping/>
+  </p:clrMapOvr>
+</p:sld>
+</file>
+
+<file path=ppt/slides/slide8.xml><?xml version="1.0" encoding="utf-8"?>
+<p:sld xmlns:a="http://schemas.openxmlformats.org/drawingml/2006/main" xmlns:r="http://schemas.openxmlformats.org/officeDocument/2006/relationships" xmlns:p="http://schemas.openxmlformats.org/presentationml/2006/main">
+  <p:cSld name="Slide 8">
+    <p:bg>
+      <p:bgPr>
+        <a:solidFill>
+          <a:srgbClr val="000000"/>
+        </a:solidFill>
+      </p:bgPr>
+    </p:bg>
+    <p:spTree>
+      <p:nvGrpSpPr>
+        <p:cNvPr id="1" name=""/>
+        <p:cNvGrpSpPr/>
+        <p:nvPr/>
+      </p:nvGrpSpPr>
+      <p:grpSpPr>
+        <a:xfrm>
+          <a:off x="0" y="0"/>
+          <a:ext cx="0" cy="0"/>
+          <a:chOff x="0" y="0"/>
+          <a:chExt cx="0" cy="0"/>
+        </a:xfrm>
+      </p:grpSpPr>
+      <p:sp>
+        <p:nvSpPr>
+          <p:cNvPr id="2" name="Text 0"/>
+          <p:cNvSpPr txBox="1"/>
+          <p:nvPr/>
+        </p:nvSpPr>
+        <p:spPr>
+          <a:xfrm>
+            <a:off x="548640" y="457200"/>
+            <a:ext cx="11064240" cy="5943600"/>
+          </a:xfrm>
+          <a:prstGeom prst="rect">
+            <a:avLst/>
+          </a:prstGeom>
+          <a:noFill/>
+          <a:ln/>
+        </p:spPr>
+        <p:txBody>
+          <a:bodyPr wrap="square" lIns="0" tIns="0" rIns="0" bIns="0" rtlCol="0" anchor="ctr"/>
+          <a:lstStyle/>
+          <a:p>
+            <a:pPr algn="ctr" indent="0" marL="0">
+              <a:buNone/>
+            </a:pPr>
+            <a:r>
+              <a:rPr lang="en-US" sz="4800" b="1" i="1" dirty="0">
+                <a:solidFill>
+                  <a:srgbClr val="FFFFFF"/>
+                </a:solidFill>
+                <a:latin typeface="Arial" pitchFamily="34" charset="0"/>
+                <a:ea typeface="Arial" pitchFamily="34" charset="-122"/>
+                <a:cs typeface="Arial" pitchFamily="34" charset="-120"/>
+              </a:rPr>
+              <a:t>CRUCIFIED, laid behind the stone</a:t>
+            </a:r>
+            <a:endParaRPr lang="en-US" sz="4800" dirty="0"/>
+          </a:p>
+          <a:p>
+            <a:pPr algn="ctr" indent="0" marL="0">
+              <a:buNone/>
+            </a:pPr>
+            <a:r>
+              <a:rPr lang="en-US" sz="4800" b="1" i="1" dirty="0">
+                <a:solidFill>
+                  <a:srgbClr val="FFFFFF"/>
+                </a:solidFill>
+                <a:latin typeface="Arial" pitchFamily="34" charset="0"/>
+                <a:ea typeface="Arial" pitchFamily="34" charset="-122"/>
+                <a:cs typeface="Arial" pitchFamily="34" charset="-120"/>
+              </a:rPr>
+              <a:t>You lived to die, rejected and alone</a:t>
+            </a:r>
+            <a:endParaRPr lang="en-US" sz="4800" dirty="0"/>
+          </a:p>
+          <a:p>
+            <a:pPr algn="ctr" indent="0" marL="0">
+              <a:buNone/>
+            </a:pPr>
+            <a:r>
+              <a:rPr lang="en-US" sz="4800" b="1" i="1" dirty="0">
+                <a:solidFill>
+                  <a:srgbClr val="FFFFFF"/>
+                </a:solidFill>
+                <a:latin typeface="Arial" pitchFamily="34" charset="0"/>
+                <a:ea typeface="Arial" pitchFamily="34" charset="-122"/>
+                <a:cs typeface="Arial" pitchFamily="34" charset="-120"/>
+              </a:rPr>
+              <a:t>Like a rose, trampled on the ground</a:t>
+            </a:r>
+            <a:endParaRPr lang="en-US" sz="4800" dirty="0"/>
+          </a:p>
+          <a:p>
+            <a:pPr algn="ctr" indent="0" marL="0">
+              <a:buNone/>
+            </a:pPr>
+            <a:r>
+              <a:rPr lang="en-US" sz="4800" b="1" i="1" dirty="0">
+                <a:solidFill>
+                  <a:srgbClr val="FFFFFF"/>
+                </a:solidFill>
+                <a:latin typeface="Arial" pitchFamily="34" charset="0"/>
+                <a:ea typeface="Arial" pitchFamily="34" charset="-122"/>
+                <a:cs typeface="Arial" pitchFamily="34" charset="-120"/>
+              </a:rPr>
+              <a:t>You took the fall, and thought of me above all</a:t>
+            </a:r>
+            <a:endParaRPr lang="en-US" sz="4800" dirty="0"/>
+          </a:p>
+          <a:p>
+            <a:pPr algn="ctr" indent="0" marL="0">
+              <a:buNone/>
+            </a:pPr>
+            <a:r>
+              <a:rPr lang="en-US" sz="4800" b="1" i="1" dirty="0">
                 <a:solidFill>
                   <a:srgbClr val="FFFFFF"/>
                 </a:solidFill>
@@ -2244,7 +2404,7 @@
               </a:rPr>
               <a:t>***</a:t>
             </a:r>
-            <a:endParaRPr lang="en-US" sz="4000" dirty="0"/>
+            <a:endParaRPr lang="en-US" sz="4800" dirty="0"/>
           </a:p>
         </p:txBody>
       </p:sp>

--- a/fubc-en/2-Above All Powers.pptx
+++ b/fubc-en/2-Above All Powers.pptx
@@ -13,9 +13,13 @@
     <p:sldId id="261" r:id="rId7"/>
     <p:sldId id="262" r:id="rId8"/>
     <p:sldId id="263" r:id="rId9"/>
+    <p:sldId id="264" r:id="rId10"/>
+    <p:sldId id="265" r:id="rId11"/>
+    <p:sldId id="266" r:id="rId12"/>
+    <p:sldId id="267" r:id="rId13"/>
   </p:sldIdLst>
   <p:notesMasterIdLst>
-    <p:notesMasterId r:id="rId10"/>
+    <p:notesMasterId r:id="rId14"/>
   </p:notesMasterIdLst>
   <p:sldSz cx="12192000" cy="6858000"/>
   <p:notesSz cx="6858000" cy="12192000"/>
@@ -551,6 +555,270 @@
 </p:notes>
 </file>
 
+<file path=ppt/notesSlides/notesSlide10.xml><?xml version="1.0" encoding="utf-8"?>
+<p:notes xmlns:a="http://schemas.openxmlformats.org/drawingml/2006/main" xmlns:r="http://schemas.openxmlformats.org/officeDocument/2006/relationships" xmlns:p="http://schemas.openxmlformats.org/presentationml/2006/main">
+  <p:cSld>
+    <p:spTree>
+      <p:nvGrpSpPr>
+        <p:cNvPr id="1" name=""/>
+        <p:cNvGrpSpPr/>
+        <p:nvPr/>
+      </p:nvGrpSpPr>
+      <p:grpSpPr>
+        <a:xfrm>
+          <a:off x="0" y="0"/>
+          <a:ext cx="0" cy="0"/>
+          <a:chOff x="0" y="0"/>
+          <a:chExt cx="0" cy="0"/>
+        </a:xfrm>
+      </p:grpSpPr>
+      <p:sp>
+        <p:nvSpPr>
+          <p:cNvPr id="2" name="Slide Image Placeholder 1"/>
+          <p:cNvSpPr>
+            <a:spLocks noGrp="1" noRot="1" noChangeAspect="1"/>
+          </p:cNvSpPr>
+          <p:nvPr>
+            <p:ph type="sldImg"/>
+          </p:nvPr>
+        </p:nvSpPr>
+        <p:spPr/>
+      </p:sp>
+      <p:sp>
+        <p:nvSpPr>
+          <p:cNvPr id="3" name="Notes Placeholder 2"/>
+          <p:cNvSpPr>
+            <a:spLocks noGrp="1"/>
+          </p:cNvSpPr>
+          <p:nvPr>
+            <p:ph type="body" idx="1"/>
+          </p:nvPr>
+        </p:nvSpPr>
+        <p:spPr/>
+        <p:txBody>
+          <a:bodyPr/>
+          <a:lstStyle/>
+          <a:p>
+            <a:r>
+              <a:rPr lang="en-US" dirty="0"/>
+              <a:t/>
+            </a:r>
+            <a:endParaRPr lang="en-US" dirty="0"/>
+          </a:p>
+        </p:txBody>
+      </p:sp>
+      <p:sp>
+        <p:nvSpPr>
+          <p:cNvPr id="4" name="Slide Number Placeholder 3"/>
+          <p:cNvSpPr>
+            <a:spLocks noGrp="1"/>
+          </p:cNvSpPr>
+          <p:nvPr>
+            <p:ph type="sldNum" sz="quarter" idx="10"/>
+          </p:nvPr>
+        </p:nvSpPr>
+        <p:spPr/>
+        <p:txBody>
+          <a:bodyPr/>
+          <a:lstStyle/>
+          <a:p>
+            <a:fld id="{F7021451-1387-4CA6-816F-3879F97B5CBC}" type="slidenum">
+              <a:rPr lang="en-US"/>
+              <a:t>10</a:t>
+            </a:fld>
+            <a:endParaRPr lang="en-US"/>
+          </a:p>
+        </p:txBody>
+      </p:sp>
+    </p:spTree>
+    <p:extLst>
+      <p:ext uri="{BB962C8B-B14F-4D97-AF65-F5344CB8AC3E}">
+        <p14:creationId xmlns:p14="http://schemas.microsoft.com/office/powerpoint/2010/main" val="1024086991"/>
+      </p:ext>
+    </p:extLst>
+  </p:cSld>
+  <p:clrMapOvr>
+    <a:masterClrMapping/>
+  </p:clrMapOvr>
+</p:notes>
+</file>
+
+<file path=ppt/notesSlides/notesSlide11.xml><?xml version="1.0" encoding="utf-8"?>
+<p:notes xmlns:a="http://schemas.openxmlformats.org/drawingml/2006/main" xmlns:r="http://schemas.openxmlformats.org/officeDocument/2006/relationships" xmlns:p="http://schemas.openxmlformats.org/presentationml/2006/main">
+  <p:cSld>
+    <p:spTree>
+      <p:nvGrpSpPr>
+        <p:cNvPr id="1" name=""/>
+        <p:cNvGrpSpPr/>
+        <p:nvPr/>
+      </p:nvGrpSpPr>
+      <p:grpSpPr>
+        <a:xfrm>
+          <a:off x="0" y="0"/>
+          <a:ext cx="0" cy="0"/>
+          <a:chOff x="0" y="0"/>
+          <a:chExt cx="0" cy="0"/>
+        </a:xfrm>
+      </p:grpSpPr>
+      <p:sp>
+        <p:nvSpPr>
+          <p:cNvPr id="2" name="Slide Image Placeholder 1"/>
+          <p:cNvSpPr>
+            <a:spLocks noGrp="1" noRot="1" noChangeAspect="1"/>
+          </p:cNvSpPr>
+          <p:nvPr>
+            <p:ph type="sldImg"/>
+          </p:nvPr>
+        </p:nvSpPr>
+        <p:spPr/>
+      </p:sp>
+      <p:sp>
+        <p:nvSpPr>
+          <p:cNvPr id="3" name="Notes Placeholder 2"/>
+          <p:cNvSpPr>
+            <a:spLocks noGrp="1"/>
+          </p:cNvSpPr>
+          <p:nvPr>
+            <p:ph type="body" idx="1"/>
+          </p:nvPr>
+        </p:nvSpPr>
+        <p:spPr/>
+        <p:txBody>
+          <a:bodyPr/>
+          <a:lstStyle/>
+          <a:p>
+            <a:r>
+              <a:rPr lang="en-US" dirty="0"/>
+              <a:t/>
+            </a:r>
+            <a:endParaRPr lang="en-US" dirty="0"/>
+          </a:p>
+        </p:txBody>
+      </p:sp>
+      <p:sp>
+        <p:nvSpPr>
+          <p:cNvPr id="4" name="Slide Number Placeholder 3"/>
+          <p:cNvSpPr>
+            <a:spLocks noGrp="1"/>
+          </p:cNvSpPr>
+          <p:nvPr>
+            <p:ph type="sldNum" sz="quarter" idx="10"/>
+          </p:nvPr>
+        </p:nvSpPr>
+        <p:spPr/>
+        <p:txBody>
+          <a:bodyPr/>
+          <a:lstStyle/>
+          <a:p>
+            <a:fld id="{F7021451-1387-4CA6-816F-3879F97B5CBC}" type="slidenum">
+              <a:rPr lang="en-US"/>
+              <a:t>11</a:t>
+            </a:fld>
+            <a:endParaRPr lang="en-US"/>
+          </a:p>
+        </p:txBody>
+      </p:sp>
+    </p:spTree>
+    <p:extLst>
+      <p:ext uri="{BB962C8B-B14F-4D97-AF65-F5344CB8AC3E}">
+        <p14:creationId xmlns:p14="http://schemas.microsoft.com/office/powerpoint/2010/main" val="1024086991"/>
+      </p:ext>
+    </p:extLst>
+  </p:cSld>
+  <p:clrMapOvr>
+    <a:masterClrMapping/>
+  </p:clrMapOvr>
+</p:notes>
+</file>
+
+<file path=ppt/notesSlides/notesSlide12.xml><?xml version="1.0" encoding="utf-8"?>
+<p:notes xmlns:a="http://schemas.openxmlformats.org/drawingml/2006/main" xmlns:r="http://schemas.openxmlformats.org/officeDocument/2006/relationships" xmlns:p="http://schemas.openxmlformats.org/presentationml/2006/main">
+  <p:cSld>
+    <p:spTree>
+      <p:nvGrpSpPr>
+        <p:cNvPr id="1" name=""/>
+        <p:cNvGrpSpPr/>
+        <p:nvPr/>
+      </p:nvGrpSpPr>
+      <p:grpSpPr>
+        <a:xfrm>
+          <a:off x="0" y="0"/>
+          <a:ext cx="0" cy="0"/>
+          <a:chOff x="0" y="0"/>
+          <a:chExt cx="0" cy="0"/>
+        </a:xfrm>
+      </p:grpSpPr>
+      <p:sp>
+        <p:nvSpPr>
+          <p:cNvPr id="2" name="Slide Image Placeholder 1"/>
+          <p:cNvSpPr>
+            <a:spLocks noGrp="1" noRot="1" noChangeAspect="1"/>
+          </p:cNvSpPr>
+          <p:nvPr>
+            <p:ph type="sldImg"/>
+          </p:nvPr>
+        </p:nvSpPr>
+        <p:spPr/>
+      </p:sp>
+      <p:sp>
+        <p:nvSpPr>
+          <p:cNvPr id="3" name="Notes Placeholder 2"/>
+          <p:cNvSpPr>
+            <a:spLocks noGrp="1"/>
+          </p:cNvSpPr>
+          <p:nvPr>
+            <p:ph type="body" idx="1"/>
+          </p:nvPr>
+        </p:nvSpPr>
+        <p:spPr/>
+        <p:txBody>
+          <a:bodyPr/>
+          <a:lstStyle/>
+          <a:p>
+            <a:r>
+              <a:rPr lang="en-US" dirty="0"/>
+              <a:t/>
+            </a:r>
+            <a:endParaRPr lang="en-US" dirty="0"/>
+          </a:p>
+        </p:txBody>
+      </p:sp>
+      <p:sp>
+        <p:nvSpPr>
+          <p:cNvPr id="4" name="Slide Number Placeholder 3"/>
+          <p:cNvSpPr>
+            <a:spLocks noGrp="1"/>
+          </p:cNvSpPr>
+          <p:nvPr>
+            <p:ph type="sldNum" sz="quarter" idx="10"/>
+          </p:nvPr>
+        </p:nvSpPr>
+        <p:spPr/>
+        <p:txBody>
+          <a:bodyPr/>
+          <a:lstStyle/>
+          <a:p>
+            <a:fld id="{F7021451-1387-4CA6-816F-3879F97B5CBC}" type="slidenum">
+              <a:rPr lang="en-US"/>
+              <a:t>12</a:t>
+            </a:fld>
+            <a:endParaRPr lang="en-US"/>
+          </a:p>
+        </p:txBody>
+      </p:sp>
+    </p:spTree>
+    <p:extLst>
+      <p:ext uri="{BB962C8B-B14F-4D97-AF65-F5344CB8AC3E}">
+        <p14:creationId xmlns:p14="http://schemas.microsoft.com/office/powerpoint/2010/main" val="1024086991"/>
+      </p:ext>
+    </p:extLst>
+  </p:cSld>
+  <p:clrMapOvr>
+    <a:masterClrMapping/>
+  </p:clrMapOvr>
+</p:notes>
+</file>
+
 <file path=ppt/notesSlides/notesSlide2.xml><?xml version="1.0" encoding="utf-8"?>
 <p:notes xmlns:a="http://schemas.openxmlformats.org/drawingml/2006/main" xmlns:r="http://schemas.openxmlformats.org/officeDocument/2006/relationships" xmlns:p="http://schemas.openxmlformats.org/presentationml/2006/main">
   <p:cSld>
@@ -1149,6 +1417,94 @@
             <a:fld id="{F7021451-1387-4CA6-816F-3879F97B5CBC}" type="slidenum">
               <a:rPr lang="en-US"/>
               <a:t>8</a:t>
+            </a:fld>
+            <a:endParaRPr lang="en-US"/>
+          </a:p>
+        </p:txBody>
+      </p:sp>
+    </p:spTree>
+    <p:extLst>
+      <p:ext uri="{BB962C8B-B14F-4D97-AF65-F5344CB8AC3E}">
+        <p14:creationId xmlns:p14="http://schemas.microsoft.com/office/powerpoint/2010/main" val="1024086991"/>
+      </p:ext>
+    </p:extLst>
+  </p:cSld>
+  <p:clrMapOvr>
+    <a:masterClrMapping/>
+  </p:clrMapOvr>
+</p:notes>
+</file>
+
+<file path=ppt/notesSlides/notesSlide9.xml><?xml version="1.0" encoding="utf-8"?>
+<p:notes xmlns:a="http://schemas.openxmlformats.org/drawingml/2006/main" xmlns:r="http://schemas.openxmlformats.org/officeDocument/2006/relationships" xmlns:p="http://schemas.openxmlformats.org/presentationml/2006/main">
+  <p:cSld>
+    <p:spTree>
+      <p:nvGrpSpPr>
+        <p:cNvPr id="1" name=""/>
+        <p:cNvGrpSpPr/>
+        <p:nvPr/>
+      </p:nvGrpSpPr>
+      <p:grpSpPr>
+        <a:xfrm>
+          <a:off x="0" y="0"/>
+          <a:ext cx="0" cy="0"/>
+          <a:chOff x="0" y="0"/>
+          <a:chExt cx="0" cy="0"/>
+        </a:xfrm>
+      </p:grpSpPr>
+      <p:sp>
+        <p:nvSpPr>
+          <p:cNvPr id="2" name="Slide Image Placeholder 1"/>
+          <p:cNvSpPr>
+            <a:spLocks noGrp="1" noRot="1" noChangeAspect="1"/>
+          </p:cNvSpPr>
+          <p:nvPr>
+            <p:ph type="sldImg"/>
+          </p:nvPr>
+        </p:nvSpPr>
+        <p:spPr/>
+      </p:sp>
+      <p:sp>
+        <p:nvSpPr>
+          <p:cNvPr id="3" name="Notes Placeholder 2"/>
+          <p:cNvSpPr>
+            <a:spLocks noGrp="1"/>
+          </p:cNvSpPr>
+          <p:nvPr>
+            <p:ph type="body" idx="1"/>
+          </p:nvPr>
+        </p:nvSpPr>
+        <p:spPr/>
+        <p:txBody>
+          <a:bodyPr/>
+          <a:lstStyle/>
+          <a:p>
+            <a:r>
+              <a:rPr lang="en-US" dirty="0"/>
+              <a:t/>
+            </a:r>
+            <a:endParaRPr lang="en-US" dirty="0"/>
+          </a:p>
+        </p:txBody>
+      </p:sp>
+      <p:sp>
+        <p:nvSpPr>
+          <p:cNvPr id="4" name="Slide Number Placeholder 3"/>
+          <p:cNvSpPr>
+            <a:spLocks noGrp="1"/>
+          </p:cNvSpPr>
+          <p:nvPr>
+            <p:ph type="sldNum" sz="quarter" idx="10"/>
+          </p:nvPr>
+        </p:nvSpPr>
+        <p:spPr/>
+        <p:txBody>
+          <a:bodyPr/>
+          <a:lstStyle/>
+          <a:p>
+            <a:fld id="{F7021451-1387-4CA6-816F-3879F97B5CBC}" type="slidenum">
+              <a:rPr lang="en-US"/>
+              <a:t>9</a:t>
             </a:fld>
             <a:endParaRPr lang="en-US"/>
           </a:p>
@@ -1545,6 +1901,395 @@
 </p:sld>
 </file>
 
+<file path=ppt/slides/slide10.xml><?xml version="1.0" encoding="utf-8"?>
+<p:sld xmlns:a="http://schemas.openxmlformats.org/drawingml/2006/main" xmlns:r="http://schemas.openxmlformats.org/officeDocument/2006/relationships" xmlns:p="http://schemas.openxmlformats.org/presentationml/2006/main">
+  <p:cSld name="Slide 10">
+    <p:bg>
+      <p:bgPr>
+        <a:solidFill>
+          <a:srgbClr val="000000"/>
+        </a:solidFill>
+      </p:bgPr>
+    </p:bg>
+    <p:spTree>
+      <p:nvGrpSpPr>
+        <p:cNvPr id="1" name=""/>
+        <p:cNvGrpSpPr/>
+        <p:nvPr/>
+      </p:nvGrpSpPr>
+      <p:grpSpPr>
+        <a:xfrm>
+          <a:off x="0" y="0"/>
+          <a:ext cx="0" cy="0"/>
+          <a:chOff x="0" y="0"/>
+          <a:chExt cx="0" cy="0"/>
+        </a:xfrm>
+      </p:grpSpPr>
+      <p:sp>
+        <p:nvSpPr>
+          <p:cNvPr id="2" name="Text 0"/>
+          <p:cNvSpPr txBox="1"/>
+          <p:nvPr/>
+        </p:nvSpPr>
+        <p:spPr>
+          <a:xfrm>
+            <a:off x="548640" y="457200"/>
+            <a:ext cx="11064240" cy="5943600"/>
+          </a:xfrm>
+          <a:prstGeom prst="rect">
+            <a:avLst/>
+          </a:prstGeom>
+          <a:noFill/>
+          <a:ln/>
+        </p:spPr>
+        <p:txBody>
+          <a:bodyPr wrap="square" lIns="0" tIns="0" rIns="0" bIns="0" rtlCol="0" anchor="ctr"/>
+          <a:lstStyle/>
+          <a:p>
+            <a:pPr algn="ctr" indent="0" marL="0">
+              <a:buNone/>
+            </a:pPr>
+            <a:r>
+              <a:rPr lang="en-US" sz="4800" b="1" dirty="0">
+                <a:solidFill>
+                  <a:srgbClr val="FFFFFF"/>
+                </a:solidFill>
+                <a:latin typeface="Arial" pitchFamily="34" charset="0"/>
+                <a:ea typeface="Arial" pitchFamily="34" charset="-122"/>
+                <a:cs typeface="Arial" pitchFamily="34" charset="-120"/>
+              </a:rPr>
+              <a:t>Above all wealth </a:t>
+            </a:r>
+            <a:endParaRPr lang="en-US" sz="4800" dirty="0"/>
+          </a:p>
+          <a:p>
+            <a:pPr algn="ctr" indent="0" marL="0">
+              <a:buNone/>
+            </a:pPr>
+            <a:r>
+              <a:rPr lang="en-US" sz="4800" b="1" dirty="0">
+                <a:solidFill>
+                  <a:srgbClr val="FFFFFF"/>
+                </a:solidFill>
+                <a:latin typeface="Arial" pitchFamily="34" charset="0"/>
+                <a:ea typeface="Arial" pitchFamily="34" charset="-122"/>
+                <a:cs typeface="Arial" pitchFamily="34" charset="-120"/>
+              </a:rPr>
+              <a:t>and treasures of the earth</a:t>
+            </a:r>
+            <a:endParaRPr lang="en-US" sz="4800" dirty="0"/>
+          </a:p>
+          <a:p>
+            <a:pPr algn="ctr" indent="0" marL="0">
+              <a:buNone/>
+            </a:pPr>
+            <a:r>
+              <a:rPr lang="en-US" sz="4800" b="1" dirty="0">
+                <a:solidFill>
+                  <a:srgbClr val="FFFFFF"/>
+                </a:solidFill>
+                <a:latin typeface="Arial" pitchFamily="34" charset="0"/>
+                <a:ea typeface="Arial" pitchFamily="34" charset="-122"/>
+                <a:cs typeface="Arial" pitchFamily="34" charset="-120"/>
+              </a:rPr>
+              <a:t>There’s no way to measure </a:t>
+            </a:r>
+            <a:endParaRPr lang="en-US" sz="4800" dirty="0"/>
+          </a:p>
+          <a:p>
+            <a:pPr algn="ctr" indent="0" marL="0">
+              <a:buNone/>
+            </a:pPr>
+            <a:r>
+              <a:rPr lang="en-US" sz="4800" b="1" dirty="0">
+                <a:solidFill>
+                  <a:srgbClr val="FFFFFF"/>
+                </a:solidFill>
+                <a:latin typeface="Arial" pitchFamily="34" charset="0"/>
+                <a:ea typeface="Arial" pitchFamily="34" charset="-122"/>
+                <a:cs typeface="Arial" pitchFamily="34" charset="-120"/>
+              </a:rPr>
+              <a:t>what you're worth</a:t>
+            </a:r>
+            <a:endParaRPr lang="en-US" sz="4800" dirty="0"/>
+          </a:p>
+        </p:txBody>
+      </p:sp>
+    </p:spTree>
+  </p:cSld>
+  <p:clrMapOvr>
+    <a:masterClrMapping/>
+  </p:clrMapOvr>
+</p:sld>
+</file>
+
+<file path=ppt/slides/slide11.xml><?xml version="1.0" encoding="utf-8"?>
+<p:sld xmlns:a="http://schemas.openxmlformats.org/drawingml/2006/main" xmlns:r="http://schemas.openxmlformats.org/officeDocument/2006/relationships" xmlns:p="http://schemas.openxmlformats.org/presentationml/2006/main">
+  <p:cSld name="Slide 11">
+    <p:bg>
+      <p:bgPr>
+        <a:solidFill>
+          <a:srgbClr val="000000"/>
+        </a:solidFill>
+      </p:bgPr>
+    </p:bg>
+    <p:spTree>
+      <p:nvGrpSpPr>
+        <p:cNvPr id="1" name=""/>
+        <p:cNvGrpSpPr/>
+        <p:nvPr/>
+      </p:nvGrpSpPr>
+      <p:grpSpPr>
+        <a:xfrm>
+          <a:off x="0" y="0"/>
+          <a:ext cx="0" cy="0"/>
+          <a:chOff x="0" y="0"/>
+          <a:chExt cx="0" cy="0"/>
+        </a:xfrm>
+      </p:grpSpPr>
+      <p:sp>
+        <p:nvSpPr>
+          <p:cNvPr id="2" name="Text 0"/>
+          <p:cNvSpPr txBox="1"/>
+          <p:nvPr/>
+        </p:nvSpPr>
+        <p:spPr>
+          <a:xfrm>
+            <a:off x="548640" y="457200"/>
+            <a:ext cx="11064240" cy="5943600"/>
+          </a:xfrm>
+          <a:prstGeom prst="rect">
+            <a:avLst/>
+          </a:prstGeom>
+          <a:noFill/>
+          <a:ln/>
+        </p:spPr>
+        <p:txBody>
+          <a:bodyPr wrap="square" lIns="0" tIns="0" rIns="0" bIns="0" rtlCol="0" anchor="ctr"/>
+          <a:lstStyle/>
+          <a:p>
+            <a:pPr algn="ctr" indent="0" marL="0">
+              <a:buNone/>
+            </a:pPr>
+            <a:r>
+              <a:rPr lang="en-US" sz="4800" b="1" i="1" dirty="0">
+                <a:solidFill>
+                  <a:srgbClr val="FFFFFF"/>
+                </a:solidFill>
+                <a:latin typeface="Arial" pitchFamily="34" charset="0"/>
+                <a:ea typeface="Arial" pitchFamily="34" charset="-122"/>
+                <a:cs typeface="Arial" pitchFamily="34" charset="-120"/>
+              </a:rPr>
+              <a:t>CRUCIFIED, laid behind the stone</a:t>
+            </a:r>
+            <a:endParaRPr lang="en-US" sz="4800" dirty="0"/>
+          </a:p>
+          <a:p>
+            <a:pPr algn="ctr" indent="0" marL="0">
+              <a:buNone/>
+            </a:pPr>
+            <a:r>
+              <a:rPr lang="en-US" sz="4800" b="1" i="1" dirty="0">
+                <a:solidFill>
+                  <a:srgbClr val="FFFFFF"/>
+                </a:solidFill>
+                <a:latin typeface="Arial" pitchFamily="34" charset="0"/>
+                <a:ea typeface="Arial" pitchFamily="34" charset="-122"/>
+                <a:cs typeface="Arial" pitchFamily="34" charset="-120"/>
+              </a:rPr>
+              <a:t>You lived to die, rejected and alone</a:t>
+            </a:r>
+            <a:endParaRPr lang="en-US" sz="4800" dirty="0"/>
+          </a:p>
+          <a:p>
+            <a:pPr algn="ctr" indent="0" marL="0">
+              <a:buNone/>
+            </a:pPr>
+            <a:r>
+              <a:rPr lang="en-US" sz="4800" b="1" i="1" dirty="0">
+                <a:solidFill>
+                  <a:srgbClr val="FFFFFF"/>
+                </a:solidFill>
+                <a:latin typeface="Arial" pitchFamily="34" charset="0"/>
+                <a:ea typeface="Arial" pitchFamily="34" charset="-122"/>
+                <a:cs typeface="Arial" pitchFamily="34" charset="-120"/>
+              </a:rPr>
+              <a:t>Like a rose, trampled on the ground</a:t>
+            </a:r>
+            <a:endParaRPr lang="en-US" sz="4800" dirty="0"/>
+          </a:p>
+          <a:p>
+            <a:pPr algn="ctr" indent="0" marL="0">
+              <a:buNone/>
+            </a:pPr>
+            <a:r>
+              <a:rPr lang="en-US" sz="4800" b="1" i="1" dirty="0">
+                <a:solidFill>
+                  <a:srgbClr val="FFFFFF"/>
+                </a:solidFill>
+                <a:latin typeface="Arial" pitchFamily="34" charset="0"/>
+                <a:ea typeface="Arial" pitchFamily="34" charset="-122"/>
+                <a:cs typeface="Arial" pitchFamily="34" charset="-120"/>
+              </a:rPr>
+              <a:t>You took the fall, and thought of me above all</a:t>
+            </a:r>
+            <a:endParaRPr lang="en-US" sz="4800" dirty="0"/>
+          </a:p>
+        </p:txBody>
+      </p:sp>
+    </p:spTree>
+  </p:cSld>
+  <p:clrMapOvr>
+    <a:masterClrMapping/>
+  </p:clrMapOvr>
+</p:sld>
+</file>
+
+<file path=ppt/slides/slide12.xml><?xml version="1.0" encoding="utf-8"?>
+<p:sld xmlns:a="http://schemas.openxmlformats.org/drawingml/2006/main" xmlns:r="http://schemas.openxmlformats.org/officeDocument/2006/relationships" xmlns:p="http://schemas.openxmlformats.org/presentationml/2006/main">
+  <p:cSld name="Slide 12">
+    <p:bg>
+      <p:bgPr>
+        <a:solidFill>
+          <a:srgbClr val="000000"/>
+        </a:solidFill>
+      </p:bgPr>
+    </p:bg>
+    <p:spTree>
+      <p:nvGrpSpPr>
+        <p:cNvPr id="1" name=""/>
+        <p:cNvGrpSpPr/>
+        <p:nvPr/>
+      </p:nvGrpSpPr>
+      <p:grpSpPr>
+        <a:xfrm>
+          <a:off x="0" y="0"/>
+          <a:ext cx="0" cy="0"/>
+          <a:chOff x="0" y="0"/>
+          <a:chExt cx="0" cy="0"/>
+        </a:xfrm>
+      </p:grpSpPr>
+      <p:sp>
+        <p:nvSpPr>
+          <p:cNvPr id="2" name="Text 0"/>
+          <p:cNvSpPr txBox="1"/>
+          <p:nvPr/>
+        </p:nvSpPr>
+        <p:spPr>
+          <a:xfrm>
+            <a:off x="548640" y="457200"/>
+            <a:ext cx="11064240" cy="5943600"/>
+          </a:xfrm>
+          <a:prstGeom prst="rect">
+            <a:avLst/>
+          </a:prstGeom>
+          <a:noFill/>
+          <a:ln/>
+        </p:spPr>
+        <p:txBody>
+          <a:bodyPr wrap="square" lIns="0" tIns="0" rIns="0" bIns="0" rtlCol="0" anchor="ctr"/>
+          <a:lstStyle/>
+          <a:p>
+            <a:pPr algn="ctr" indent="0" marL="0">
+              <a:buNone/>
+            </a:pPr>
+            <a:r>
+              <a:rPr lang="en-US" sz="4800" b="1" i="1" dirty="0">
+                <a:solidFill>
+                  <a:srgbClr val="FFFFFF"/>
+                </a:solidFill>
+                <a:latin typeface="Arial" pitchFamily="34" charset="0"/>
+                <a:ea typeface="Arial" pitchFamily="34" charset="-122"/>
+                <a:cs typeface="Arial" pitchFamily="34" charset="-120"/>
+              </a:rPr>
+              <a:t>CRUCIFIED, laid behind the stone</a:t>
+            </a:r>
+            <a:endParaRPr lang="en-US" sz="4800" dirty="0"/>
+          </a:p>
+          <a:p>
+            <a:pPr algn="ctr" indent="0" marL="0">
+              <a:buNone/>
+            </a:pPr>
+            <a:r>
+              <a:rPr lang="en-US" sz="4800" b="1" i="1" dirty="0">
+                <a:solidFill>
+                  <a:srgbClr val="FFFFFF"/>
+                </a:solidFill>
+                <a:latin typeface="Arial" pitchFamily="34" charset="0"/>
+                <a:ea typeface="Arial" pitchFamily="34" charset="-122"/>
+                <a:cs typeface="Arial" pitchFamily="34" charset="-120"/>
+              </a:rPr>
+              <a:t>You lived to die, rejected and alone</a:t>
+            </a:r>
+            <a:endParaRPr lang="en-US" sz="4800" dirty="0"/>
+          </a:p>
+          <a:p>
+            <a:pPr algn="ctr" indent="0" marL="0">
+              <a:buNone/>
+            </a:pPr>
+            <a:r>
+              <a:rPr lang="en-US" sz="4800" b="1" i="1" dirty="0">
+                <a:solidFill>
+                  <a:srgbClr val="FFFFFF"/>
+                </a:solidFill>
+                <a:latin typeface="Arial" pitchFamily="34" charset="0"/>
+                <a:ea typeface="Arial" pitchFamily="34" charset="-122"/>
+                <a:cs typeface="Arial" pitchFamily="34" charset="-120"/>
+              </a:rPr>
+              <a:t>Like a rose, trampled on the ground</a:t>
+            </a:r>
+            <a:endParaRPr lang="en-US" sz="4800" dirty="0"/>
+          </a:p>
+          <a:p>
+            <a:pPr algn="ctr" indent="0" marL="0">
+              <a:buNone/>
+            </a:pPr>
+            <a:r>
+              <a:rPr lang="en-US" sz="4800" b="1" i="1" dirty="0">
+                <a:solidFill>
+                  <a:srgbClr val="FFFFFF"/>
+                </a:solidFill>
+                <a:latin typeface="Arial" pitchFamily="34" charset="0"/>
+                <a:ea typeface="Arial" pitchFamily="34" charset="-122"/>
+                <a:cs typeface="Arial" pitchFamily="34" charset="-120"/>
+              </a:rPr>
+              <a:t>You took the fall, and thought of me above all</a:t>
+            </a:r>
+            <a:endParaRPr lang="en-US" sz="4800" dirty="0"/>
+          </a:p>
+          <a:p>
+            <a:pPr algn="ctr" indent="0" marL="0">
+              <a:buNone/>
+            </a:pPr>
+            <a:endParaRPr lang="en-US" sz="4800" dirty="0"/>
+          </a:p>
+          <a:p>
+            <a:pPr algn="ctr" indent="0" marL="0">
+              <a:buNone/>
+            </a:pPr>
+            <a:r>
+              <a:rPr lang="en-US" sz="4800" b="1" i="1" dirty="0">
+                <a:solidFill>
+                  <a:srgbClr val="FFFFFF"/>
+                </a:solidFill>
+                <a:latin typeface="Arial" pitchFamily="34" charset="0"/>
+                <a:ea typeface="Arial" pitchFamily="34" charset="-122"/>
+                <a:cs typeface="Arial" pitchFamily="34" charset="-120"/>
+              </a:rPr>
+              <a:t>***</a:t>
+            </a:r>
+            <a:endParaRPr lang="en-US" sz="4800" dirty="0"/>
+          </a:p>
+        </p:txBody>
+      </p:sp>
+    </p:spTree>
+  </p:cSld>
+  <p:clrMapOvr>
+    <a:masterClrMapping/>
+  </p:clrMapOvr>
+</p:sld>
+</file>
+
 <file path=ppt/slides/slide2.xml><?xml version="1.0" encoding="utf-8"?>
 <p:sld xmlns:a="http://schemas.openxmlformats.org/drawingml/2006/main" xmlns:r="http://schemas.openxmlformats.org/officeDocument/2006/relationships" xmlns:p="http://schemas.openxmlformats.org/presentationml/2006/main">
   <p:cSld name="Slide 2">
@@ -1602,7 +2347,7 @@
                 <a:ea typeface="Arial" pitchFamily="34" charset="-122"/>
                 <a:cs typeface="Arial" pitchFamily="34" charset="-120"/>
               </a:rPr>
-              <a:t>Above all powers, above all kings</a:t>
+              <a:t>Above all powers, </a:t>
             </a:r>
             <a:endParaRPr lang="en-US" sz="4800" dirty="0"/>
           </a:p>
@@ -1619,7 +2364,7 @@
                 <a:ea typeface="Arial" pitchFamily="34" charset="-122"/>
                 <a:cs typeface="Arial" pitchFamily="34" charset="-120"/>
               </a:rPr>
-              <a:t>Above all nature and all created things</a:t>
+              <a:t>above all kings</a:t>
             </a:r>
             <a:endParaRPr lang="en-US" sz="4800" dirty="0"/>
           </a:p>
@@ -1636,7 +2381,7 @@
                 <a:ea typeface="Arial" pitchFamily="34" charset="-122"/>
                 <a:cs typeface="Arial" pitchFamily="34" charset="-120"/>
               </a:rPr>
-              <a:t>Above all wisdom and all the ways of man.</a:t>
+              <a:t>Above all nature </a:t>
             </a:r>
             <a:endParaRPr lang="en-US" sz="4800" dirty="0"/>
           </a:p>
@@ -1653,7 +2398,7 @@
                 <a:ea typeface="Arial" pitchFamily="34" charset="-122"/>
                 <a:cs typeface="Arial" pitchFamily="34" charset="-120"/>
               </a:rPr>
-              <a:t>You were here before the world began.</a:t>
+              <a:t>and all created things</a:t>
             </a:r>
             <a:endParaRPr lang="en-US" sz="4800" dirty="0"/>
           </a:p>
@@ -1724,7 +2469,7 @@
                 <a:ea typeface="Arial" pitchFamily="34" charset="-122"/>
                 <a:cs typeface="Arial" pitchFamily="34" charset="-120"/>
               </a:rPr>
-              <a:t>Above all kingdoms, above all thrones</a:t>
+              <a:t>Above all wisdom </a:t>
             </a:r>
             <a:endParaRPr lang="en-US" sz="4800" dirty="0"/>
           </a:p>
@@ -1741,7 +2486,7 @@
                 <a:ea typeface="Arial" pitchFamily="34" charset="-122"/>
                 <a:cs typeface="Arial" pitchFamily="34" charset="-120"/>
               </a:rPr>
-              <a:t>Above all wonders the world has ever known</a:t>
+              <a:t>and all the ways of man.</a:t>
             </a:r>
             <a:endParaRPr lang="en-US" sz="4800" dirty="0"/>
           </a:p>
@@ -1758,7 +2503,7 @@
                 <a:ea typeface="Arial" pitchFamily="34" charset="-122"/>
                 <a:cs typeface="Arial" pitchFamily="34" charset="-120"/>
               </a:rPr>
-              <a:t>Above all wealth and treasures of the earth</a:t>
+              <a:t>You were here </a:t>
             </a:r>
             <a:endParaRPr lang="en-US" sz="4800" dirty="0"/>
           </a:p>
@@ -1775,7 +2520,7 @@
                 <a:ea typeface="Arial" pitchFamily="34" charset="-122"/>
                 <a:cs typeface="Arial" pitchFamily="34" charset="-120"/>
               </a:rPr>
-              <a:t>There’s no way to measure what you're worth</a:t>
+              <a:t>before the world began.</a:t>
             </a:r>
             <a:endParaRPr lang="en-US" sz="4800" dirty="0"/>
           </a:p>
@@ -1838,66 +2583,66 @@
               <a:buNone/>
             </a:pPr>
             <a:r>
-              <a:rPr lang="en-US" sz="4800" b="1" i="1" dirty="0">
-                <a:solidFill>
-                  <a:srgbClr val="FFFFFF"/>
-                </a:solidFill>
-                <a:latin typeface="Arial" pitchFamily="34" charset="0"/>
-                <a:ea typeface="Arial" pitchFamily="34" charset="-122"/>
-                <a:cs typeface="Arial" pitchFamily="34" charset="-120"/>
-              </a:rPr>
-              <a:t>CRUCIFIED, laid behind the stone</a:t>
-            </a:r>
-            <a:endParaRPr lang="en-US" sz="4800" dirty="0"/>
-          </a:p>
-          <a:p>
-            <a:pPr algn="ctr" indent="0" marL="0">
-              <a:buNone/>
-            </a:pPr>
-            <a:r>
-              <a:rPr lang="en-US" sz="4800" b="1" i="1" dirty="0">
-                <a:solidFill>
-                  <a:srgbClr val="FFFFFF"/>
-                </a:solidFill>
-                <a:latin typeface="Arial" pitchFamily="34" charset="0"/>
-                <a:ea typeface="Arial" pitchFamily="34" charset="-122"/>
-                <a:cs typeface="Arial" pitchFamily="34" charset="-120"/>
-              </a:rPr>
-              <a:t>You lived to die, rejected and alone</a:t>
-            </a:r>
-            <a:endParaRPr lang="en-US" sz="4800" dirty="0"/>
-          </a:p>
-          <a:p>
-            <a:pPr algn="ctr" indent="0" marL="0">
-              <a:buNone/>
-            </a:pPr>
-            <a:r>
-              <a:rPr lang="en-US" sz="4800" b="1" i="1" dirty="0">
-                <a:solidFill>
-                  <a:srgbClr val="FFFFFF"/>
-                </a:solidFill>
-                <a:latin typeface="Arial" pitchFamily="34" charset="0"/>
-                <a:ea typeface="Arial" pitchFamily="34" charset="-122"/>
-                <a:cs typeface="Arial" pitchFamily="34" charset="-120"/>
-              </a:rPr>
-              <a:t>Like a rose, trampled on the ground</a:t>
-            </a:r>
-            <a:endParaRPr lang="en-US" sz="4800" dirty="0"/>
-          </a:p>
-          <a:p>
-            <a:pPr algn="ctr" indent="0" marL="0">
-              <a:buNone/>
-            </a:pPr>
-            <a:r>
-              <a:rPr lang="en-US" sz="4800" b="1" i="1" dirty="0">
-                <a:solidFill>
-                  <a:srgbClr val="FFFFFF"/>
-                </a:solidFill>
-                <a:latin typeface="Arial" pitchFamily="34" charset="0"/>
-                <a:ea typeface="Arial" pitchFamily="34" charset="-122"/>
-                <a:cs typeface="Arial" pitchFamily="34" charset="-120"/>
-              </a:rPr>
-              <a:t>You took the fall, and thought of me above all</a:t>
+              <a:rPr lang="en-US" sz="4800" b="1" dirty="0">
+                <a:solidFill>
+                  <a:srgbClr val="FFFFFF"/>
+                </a:solidFill>
+                <a:latin typeface="Arial" pitchFamily="34" charset="0"/>
+                <a:ea typeface="Arial" pitchFamily="34" charset="-122"/>
+                <a:cs typeface="Arial" pitchFamily="34" charset="-120"/>
+              </a:rPr>
+              <a:t>Above all kingdoms, </a:t>
+            </a:r>
+            <a:endParaRPr lang="en-US" sz="4800" dirty="0"/>
+          </a:p>
+          <a:p>
+            <a:pPr algn="ctr" indent="0" marL="0">
+              <a:buNone/>
+            </a:pPr>
+            <a:r>
+              <a:rPr lang="en-US" sz="4800" b="1" dirty="0">
+                <a:solidFill>
+                  <a:srgbClr val="FFFFFF"/>
+                </a:solidFill>
+                <a:latin typeface="Arial" pitchFamily="34" charset="0"/>
+                <a:ea typeface="Arial" pitchFamily="34" charset="-122"/>
+                <a:cs typeface="Arial" pitchFamily="34" charset="-120"/>
+              </a:rPr>
+              <a:t>above all thrones</a:t>
+            </a:r>
+            <a:endParaRPr lang="en-US" sz="4800" dirty="0"/>
+          </a:p>
+          <a:p>
+            <a:pPr algn="ctr" indent="0" marL="0">
+              <a:buNone/>
+            </a:pPr>
+            <a:r>
+              <a:rPr lang="en-US" sz="4800" b="1" dirty="0">
+                <a:solidFill>
+                  <a:srgbClr val="FFFFFF"/>
+                </a:solidFill>
+                <a:latin typeface="Arial" pitchFamily="34" charset="0"/>
+                <a:ea typeface="Arial" pitchFamily="34" charset="-122"/>
+                <a:cs typeface="Arial" pitchFamily="34" charset="-120"/>
+              </a:rPr>
+              <a:t>Above all wonders </a:t>
+            </a:r>
+            <a:endParaRPr lang="en-US" sz="4800" dirty="0"/>
+          </a:p>
+          <a:p>
+            <a:pPr algn="ctr" indent="0" marL="0">
+              <a:buNone/>
+            </a:pPr>
+            <a:r>
+              <a:rPr lang="en-US" sz="4800" b="1" dirty="0">
+                <a:solidFill>
+                  <a:srgbClr val="FFFFFF"/>
+                </a:solidFill>
+                <a:latin typeface="Arial" pitchFamily="34" charset="0"/>
+                <a:ea typeface="Arial" pitchFamily="34" charset="-122"/>
+                <a:cs typeface="Arial" pitchFamily="34" charset="-120"/>
+              </a:rPr>
+              <a:t>the world has ever known</a:t>
             </a:r>
             <a:endParaRPr lang="en-US" sz="4800" dirty="0"/>
           </a:p>
@@ -1968,7 +2713,7 @@
                 <a:ea typeface="Arial" pitchFamily="34" charset="-122"/>
                 <a:cs typeface="Arial" pitchFamily="34" charset="-120"/>
               </a:rPr>
-              <a:t>Above all powers, above all kings</a:t>
+              <a:t>Above all wealth </a:t>
             </a:r>
             <a:endParaRPr lang="en-US" sz="4800" dirty="0"/>
           </a:p>
@@ -1985,7 +2730,7 @@
                 <a:ea typeface="Arial" pitchFamily="34" charset="-122"/>
                 <a:cs typeface="Arial" pitchFamily="34" charset="-120"/>
               </a:rPr>
-              <a:t>Above all nature and all created things</a:t>
+              <a:t>and treasures of the earth</a:t>
             </a:r>
             <a:endParaRPr lang="en-US" sz="4800" dirty="0"/>
           </a:p>
@@ -2002,7 +2747,7 @@
                 <a:ea typeface="Arial" pitchFamily="34" charset="-122"/>
                 <a:cs typeface="Arial" pitchFamily="34" charset="-120"/>
               </a:rPr>
-              <a:t>Above all wisdom and all the ways of man.</a:t>
+              <a:t>There’s no way to measure </a:t>
             </a:r>
             <a:endParaRPr lang="en-US" sz="4800" dirty="0"/>
           </a:p>
@@ -2019,7 +2764,7 @@
                 <a:ea typeface="Arial" pitchFamily="34" charset="-122"/>
                 <a:cs typeface="Arial" pitchFamily="34" charset="-120"/>
               </a:rPr>
-              <a:t>You were here before the world began.</a:t>
+              <a:t>what you're worth</a:t>
             </a:r>
             <a:endParaRPr lang="en-US" sz="4800" dirty="0"/>
           </a:p>
@@ -2082,66 +2827,66 @@
               <a:buNone/>
             </a:pPr>
             <a:r>
-              <a:rPr lang="en-US" sz="4800" b="1" dirty="0">
-                <a:solidFill>
-                  <a:srgbClr val="FFFFFF"/>
-                </a:solidFill>
-                <a:latin typeface="Arial" pitchFamily="34" charset="0"/>
-                <a:ea typeface="Arial" pitchFamily="34" charset="-122"/>
-                <a:cs typeface="Arial" pitchFamily="34" charset="-120"/>
-              </a:rPr>
-              <a:t>Above all kingdoms, above all thrones</a:t>
-            </a:r>
-            <a:endParaRPr lang="en-US" sz="4800" dirty="0"/>
-          </a:p>
-          <a:p>
-            <a:pPr algn="ctr" indent="0" marL="0">
-              <a:buNone/>
-            </a:pPr>
-            <a:r>
-              <a:rPr lang="en-US" sz="4800" b="1" dirty="0">
-                <a:solidFill>
-                  <a:srgbClr val="FFFFFF"/>
-                </a:solidFill>
-                <a:latin typeface="Arial" pitchFamily="34" charset="0"/>
-                <a:ea typeface="Arial" pitchFamily="34" charset="-122"/>
-                <a:cs typeface="Arial" pitchFamily="34" charset="-120"/>
-              </a:rPr>
-              <a:t>Above all wonders the world has ever known</a:t>
-            </a:r>
-            <a:endParaRPr lang="en-US" sz="4800" dirty="0"/>
-          </a:p>
-          <a:p>
-            <a:pPr algn="ctr" indent="0" marL="0">
-              <a:buNone/>
-            </a:pPr>
-            <a:r>
-              <a:rPr lang="en-US" sz="4800" b="1" dirty="0">
-                <a:solidFill>
-                  <a:srgbClr val="FFFFFF"/>
-                </a:solidFill>
-                <a:latin typeface="Arial" pitchFamily="34" charset="0"/>
-                <a:ea typeface="Arial" pitchFamily="34" charset="-122"/>
-                <a:cs typeface="Arial" pitchFamily="34" charset="-120"/>
-              </a:rPr>
-              <a:t>Above all wealth and treasures of the earth</a:t>
-            </a:r>
-            <a:endParaRPr lang="en-US" sz="4800" dirty="0"/>
-          </a:p>
-          <a:p>
-            <a:pPr algn="ctr" indent="0" marL="0">
-              <a:buNone/>
-            </a:pPr>
-            <a:r>
-              <a:rPr lang="en-US" sz="4800" b="1" dirty="0">
-                <a:solidFill>
-                  <a:srgbClr val="FFFFFF"/>
-                </a:solidFill>
-                <a:latin typeface="Arial" pitchFamily="34" charset="0"/>
-                <a:ea typeface="Arial" pitchFamily="34" charset="-122"/>
-                <a:cs typeface="Arial" pitchFamily="34" charset="-120"/>
-              </a:rPr>
-              <a:t>There’s no way to measure what you're worth</a:t>
+              <a:rPr lang="en-US" sz="4800" b="1" i="1" dirty="0">
+                <a:solidFill>
+                  <a:srgbClr val="FFFFFF"/>
+                </a:solidFill>
+                <a:latin typeface="Arial" pitchFamily="34" charset="0"/>
+                <a:ea typeface="Arial" pitchFamily="34" charset="-122"/>
+                <a:cs typeface="Arial" pitchFamily="34" charset="-120"/>
+              </a:rPr>
+              <a:t>CRUCIFIED, laid behind the stone</a:t>
+            </a:r>
+            <a:endParaRPr lang="en-US" sz="4800" dirty="0"/>
+          </a:p>
+          <a:p>
+            <a:pPr algn="ctr" indent="0" marL="0">
+              <a:buNone/>
+            </a:pPr>
+            <a:r>
+              <a:rPr lang="en-US" sz="4800" b="1" i="1" dirty="0">
+                <a:solidFill>
+                  <a:srgbClr val="FFFFFF"/>
+                </a:solidFill>
+                <a:latin typeface="Arial" pitchFamily="34" charset="0"/>
+                <a:ea typeface="Arial" pitchFamily="34" charset="-122"/>
+                <a:cs typeface="Arial" pitchFamily="34" charset="-120"/>
+              </a:rPr>
+              <a:t>You lived to die, rejected and alone</a:t>
+            </a:r>
+            <a:endParaRPr lang="en-US" sz="4800" dirty="0"/>
+          </a:p>
+          <a:p>
+            <a:pPr algn="ctr" indent="0" marL="0">
+              <a:buNone/>
+            </a:pPr>
+            <a:r>
+              <a:rPr lang="en-US" sz="4800" b="1" i="1" dirty="0">
+                <a:solidFill>
+                  <a:srgbClr val="FFFFFF"/>
+                </a:solidFill>
+                <a:latin typeface="Arial" pitchFamily="34" charset="0"/>
+                <a:ea typeface="Arial" pitchFamily="34" charset="-122"/>
+                <a:cs typeface="Arial" pitchFamily="34" charset="-120"/>
+              </a:rPr>
+              <a:t>Like a rose, trampled on the ground</a:t>
+            </a:r>
+            <a:endParaRPr lang="en-US" sz="4800" dirty="0"/>
+          </a:p>
+          <a:p>
+            <a:pPr algn="ctr" indent="0" marL="0">
+              <a:buNone/>
+            </a:pPr>
+            <a:r>
+              <a:rPr lang="en-US" sz="4800" b="1" i="1" dirty="0">
+                <a:solidFill>
+                  <a:srgbClr val="FFFFFF"/>
+                </a:solidFill>
+                <a:latin typeface="Arial" pitchFamily="34" charset="0"/>
+                <a:ea typeface="Arial" pitchFamily="34" charset="-122"/>
+                <a:cs typeface="Arial" pitchFamily="34" charset="-120"/>
+              </a:rPr>
+              <a:t>You took the fall, and thought of me above all</a:t>
             </a:r>
             <a:endParaRPr lang="en-US" sz="4800" dirty="0"/>
           </a:p>
@@ -2204,66 +2949,66 @@
               <a:buNone/>
             </a:pPr>
             <a:r>
-              <a:rPr lang="en-US" sz="4800" b="1" i="1" dirty="0">
-                <a:solidFill>
-                  <a:srgbClr val="FFFFFF"/>
-                </a:solidFill>
-                <a:latin typeface="Arial" pitchFamily="34" charset="0"/>
-                <a:ea typeface="Arial" pitchFamily="34" charset="-122"/>
-                <a:cs typeface="Arial" pitchFamily="34" charset="-120"/>
-              </a:rPr>
-              <a:t>CRUCIFIED, laid behind the stone</a:t>
-            </a:r>
-            <a:endParaRPr lang="en-US" sz="4800" dirty="0"/>
-          </a:p>
-          <a:p>
-            <a:pPr algn="ctr" indent="0" marL="0">
-              <a:buNone/>
-            </a:pPr>
-            <a:r>
-              <a:rPr lang="en-US" sz="4800" b="1" i="1" dirty="0">
-                <a:solidFill>
-                  <a:srgbClr val="FFFFFF"/>
-                </a:solidFill>
-                <a:latin typeface="Arial" pitchFamily="34" charset="0"/>
-                <a:ea typeface="Arial" pitchFamily="34" charset="-122"/>
-                <a:cs typeface="Arial" pitchFamily="34" charset="-120"/>
-              </a:rPr>
-              <a:t>You lived to die, rejected and alone</a:t>
-            </a:r>
-            <a:endParaRPr lang="en-US" sz="4800" dirty="0"/>
-          </a:p>
-          <a:p>
-            <a:pPr algn="ctr" indent="0" marL="0">
-              <a:buNone/>
-            </a:pPr>
-            <a:r>
-              <a:rPr lang="en-US" sz="4800" b="1" i="1" dirty="0">
-                <a:solidFill>
-                  <a:srgbClr val="FFFFFF"/>
-                </a:solidFill>
-                <a:latin typeface="Arial" pitchFamily="34" charset="0"/>
-                <a:ea typeface="Arial" pitchFamily="34" charset="-122"/>
-                <a:cs typeface="Arial" pitchFamily="34" charset="-120"/>
-              </a:rPr>
-              <a:t>Like a rose, trampled on the ground</a:t>
-            </a:r>
-            <a:endParaRPr lang="en-US" sz="4800" dirty="0"/>
-          </a:p>
-          <a:p>
-            <a:pPr algn="ctr" indent="0" marL="0">
-              <a:buNone/>
-            </a:pPr>
-            <a:r>
-              <a:rPr lang="en-US" sz="4800" b="1" i="1" dirty="0">
-                <a:solidFill>
-                  <a:srgbClr val="FFFFFF"/>
-                </a:solidFill>
-                <a:latin typeface="Arial" pitchFamily="34" charset="0"/>
-                <a:ea typeface="Arial" pitchFamily="34" charset="-122"/>
-                <a:cs typeface="Arial" pitchFamily="34" charset="-120"/>
-              </a:rPr>
-              <a:t>You took the fall, and thought of me above all</a:t>
+              <a:rPr lang="en-US" sz="4800" b="1" dirty="0">
+                <a:solidFill>
+                  <a:srgbClr val="FFFFFF"/>
+                </a:solidFill>
+                <a:latin typeface="Arial" pitchFamily="34" charset="0"/>
+                <a:ea typeface="Arial" pitchFamily="34" charset="-122"/>
+                <a:cs typeface="Arial" pitchFamily="34" charset="-120"/>
+              </a:rPr>
+              <a:t>Above all powers, </a:t>
+            </a:r>
+            <a:endParaRPr lang="en-US" sz="4800" dirty="0"/>
+          </a:p>
+          <a:p>
+            <a:pPr algn="ctr" indent="0" marL="0">
+              <a:buNone/>
+            </a:pPr>
+            <a:r>
+              <a:rPr lang="en-US" sz="4800" b="1" dirty="0">
+                <a:solidFill>
+                  <a:srgbClr val="FFFFFF"/>
+                </a:solidFill>
+                <a:latin typeface="Arial" pitchFamily="34" charset="0"/>
+                <a:ea typeface="Arial" pitchFamily="34" charset="-122"/>
+                <a:cs typeface="Arial" pitchFamily="34" charset="-120"/>
+              </a:rPr>
+              <a:t>above all kings</a:t>
+            </a:r>
+            <a:endParaRPr lang="en-US" sz="4800" dirty="0"/>
+          </a:p>
+          <a:p>
+            <a:pPr algn="ctr" indent="0" marL="0">
+              <a:buNone/>
+            </a:pPr>
+            <a:r>
+              <a:rPr lang="en-US" sz="4800" b="1" dirty="0">
+                <a:solidFill>
+                  <a:srgbClr val="FFFFFF"/>
+                </a:solidFill>
+                <a:latin typeface="Arial" pitchFamily="34" charset="0"/>
+                <a:ea typeface="Arial" pitchFamily="34" charset="-122"/>
+                <a:cs typeface="Arial" pitchFamily="34" charset="-120"/>
+              </a:rPr>
+              <a:t>Above all nature </a:t>
+            </a:r>
+            <a:endParaRPr lang="en-US" sz="4800" dirty="0"/>
+          </a:p>
+          <a:p>
+            <a:pPr algn="ctr" indent="0" marL="0">
+              <a:buNone/>
+            </a:pPr>
+            <a:r>
+              <a:rPr lang="en-US" sz="4800" b="1" dirty="0">
+                <a:solidFill>
+                  <a:srgbClr val="FFFFFF"/>
+                </a:solidFill>
+                <a:latin typeface="Arial" pitchFamily="34" charset="0"/>
+                <a:ea typeface="Arial" pitchFamily="34" charset="-122"/>
+                <a:cs typeface="Arial" pitchFamily="34" charset="-120"/>
+              </a:rPr>
+              <a:t>and all created things</a:t>
             </a:r>
             <a:endParaRPr lang="en-US" sz="4800" dirty="0"/>
           </a:p>
@@ -2326,83 +3071,188 @@
               <a:buNone/>
             </a:pPr>
             <a:r>
-              <a:rPr lang="en-US" sz="4800" b="1" i="1" dirty="0">
-                <a:solidFill>
-                  <a:srgbClr val="FFFFFF"/>
-                </a:solidFill>
-                <a:latin typeface="Arial" pitchFamily="34" charset="0"/>
-                <a:ea typeface="Arial" pitchFamily="34" charset="-122"/>
-                <a:cs typeface="Arial" pitchFamily="34" charset="-120"/>
-              </a:rPr>
-              <a:t>CRUCIFIED, laid behind the stone</a:t>
-            </a:r>
-            <a:endParaRPr lang="en-US" sz="4800" dirty="0"/>
-          </a:p>
-          <a:p>
-            <a:pPr algn="ctr" indent="0" marL="0">
-              <a:buNone/>
-            </a:pPr>
-            <a:r>
-              <a:rPr lang="en-US" sz="4800" b="1" i="1" dirty="0">
-                <a:solidFill>
-                  <a:srgbClr val="FFFFFF"/>
-                </a:solidFill>
-                <a:latin typeface="Arial" pitchFamily="34" charset="0"/>
-                <a:ea typeface="Arial" pitchFamily="34" charset="-122"/>
-                <a:cs typeface="Arial" pitchFamily="34" charset="-120"/>
-              </a:rPr>
-              <a:t>You lived to die, rejected and alone</a:t>
-            </a:r>
-            <a:endParaRPr lang="en-US" sz="4800" dirty="0"/>
-          </a:p>
-          <a:p>
-            <a:pPr algn="ctr" indent="0" marL="0">
-              <a:buNone/>
-            </a:pPr>
-            <a:r>
-              <a:rPr lang="en-US" sz="4800" b="1" i="1" dirty="0">
-                <a:solidFill>
-                  <a:srgbClr val="FFFFFF"/>
-                </a:solidFill>
-                <a:latin typeface="Arial" pitchFamily="34" charset="0"/>
-                <a:ea typeface="Arial" pitchFamily="34" charset="-122"/>
-                <a:cs typeface="Arial" pitchFamily="34" charset="-120"/>
-              </a:rPr>
-              <a:t>Like a rose, trampled on the ground</a:t>
-            </a:r>
-            <a:endParaRPr lang="en-US" sz="4800" dirty="0"/>
-          </a:p>
-          <a:p>
-            <a:pPr algn="ctr" indent="0" marL="0">
-              <a:buNone/>
-            </a:pPr>
-            <a:r>
-              <a:rPr lang="en-US" sz="4800" b="1" i="1" dirty="0">
-                <a:solidFill>
-                  <a:srgbClr val="FFFFFF"/>
-                </a:solidFill>
-                <a:latin typeface="Arial" pitchFamily="34" charset="0"/>
-                <a:ea typeface="Arial" pitchFamily="34" charset="-122"/>
-                <a:cs typeface="Arial" pitchFamily="34" charset="-120"/>
-              </a:rPr>
-              <a:t>You took the fall, and thought of me above all</a:t>
-            </a:r>
-            <a:endParaRPr lang="en-US" sz="4800" dirty="0"/>
-          </a:p>
-          <a:p>
-            <a:pPr algn="ctr" indent="0" marL="0">
-              <a:buNone/>
-            </a:pPr>
-            <a:r>
-              <a:rPr lang="en-US" sz="4800" b="1" i="1" dirty="0">
-                <a:solidFill>
-                  <a:srgbClr val="FFFFFF"/>
-                </a:solidFill>
-                <a:latin typeface="Arial" pitchFamily="34" charset="0"/>
-                <a:ea typeface="Arial" pitchFamily="34" charset="-122"/>
-                <a:cs typeface="Arial" pitchFamily="34" charset="-120"/>
-              </a:rPr>
-              <a:t>***</a:t>
+              <a:rPr lang="en-US" sz="4800" b="1" dirty="0">
+                <a:solidFill>
+                  <a:srgbClr val="FFFFFF"/>
+                </a:solidFill>
+                <a:latin typeface="Arial" pitchFamily="34" charset="0"/>
+                <a:ea typeface="Arial" pitchFamily="34" charset="-122"/>
+                <a:cs typeface="Arial" pitchFamily="34" charset="-120"/>
+              </a:rPr>
+              <a:t>Above all wisdom </a:t>
+            </a:r>
+            <a:endParaRPr lang="en-US" sz="4800" dirty="0"/>
+          </a:p>
+          <a:p>
+            <a:pPr algn="ctr" indent="0" marL="0">
+              <a:buNone/>
+            </a:pPr>
+            <a:r>
+              <a:rPr lang="en-US" sz="4800" b="1" dirty="0">
+                <a:solidFill>
+                  <a:srgbClr val="FFFFFF"/>
+                </a:solidFill>
+                <a:latin typeface="Arial" pitchFamily="34" charset="0"/>
+                <a:ea typeface="Arial" pitchFamily="34" charset="-122"/>
+                <a:cs typeface="Arial" pitchFamily="34" charset="-120"/>
+              </a:rPr>
+              <a:t>and all the ways of man.</a:t>
+            </a:r>
+            <a:endParaRPr lang="en-US" sz="4800" dirty="0"/>
+          </a:p>
+          <a:p>
+            <a:pPr algn="ctr" indent="0" marL="0">
+              <a:buNone/>
+            </a:pPr>
+            <a:r>
+              <a:rPr lang="en-US" sz="4800" b="1" dirty="0">
+                <a:solidFill>
+                  <a:srgbClr val="FFFFFF"/>
+                </a:solidFill>
+                <a:latin typeface="Arial" pitchFamily="34" charset="0"/>
+                <a:ea typeface="Arial" pitchFamily="34" charset="-122"/>
+                <a:cs typeface="Arial" pitchFamily="34" charset="-120"/>
+              </a:rPr>
+              <a:t>You were here </a:t>
+            </a:r>
+            <a:endParaRPr lang="en-US" sz="4800" dirty="0"/>
+          </a:p>
+          <a:p>
+            <a:pPr algn="ctr" indent="0" marL="0">
+              <a:buNone/>
+            </a:pPr>
+            <a:r>
+              <a:rPr lang="en-US" sz="4800" b="1" dirty="0">
+                <a:solidFill>
+                  <a:srgbClr val="FFFFFF"/>
+                </a:solidFill>
+                <a:latin typeface="Arial" pitchFamily="34" charset="0"/>
+                <a:ea typeface="Arial" pitchFamily="34" charset="-122"/>
+                <a:cs typeface="Arial" pitchFamily="34" charset="-120"/>
+              </a:rPr>
+              <a:t>before the world began.</a:t>
+            </a:r>
+            <a:endParaRPr lang="en-US" sz="4800" dirty="0"/>
+          </a:p>
+        </p:txBody>
+      </p:sp>
+    </p:spTree>
+  </p:cSld>
+  <p:clrMapOvr>
+    <a:masterClrMapping/>
+  </p:clrMapOvr>
+</p:sld>
+</file>
+
+<file path=ppt/slides/slide9.xml><?xml version="1.0" encoding="utf-8"?>
+<p:sld xmlns:a="http://schemas.openxmlformats.org/drawingml/2006/main" xmlns:r="http://schemas.openxmlformats.org/officeDocument/2006/relationships" xmlns:p="http://schemas.openxmlformats.org/presentationml/2006/main">
+  <p:cSld name="Slide 9">
+    <p:bg>
+      <p:bgPr>
+        <a:solidFill>
+          <a:srgbClr val="000000"/>
+        </a:solidFill>
+      </p:bgPr>
+    </p:bg>
+    <p:spTree>
+      <p:nvGrpSpPr>
+        <p:cNvPr id="1" name=""/>
+        <p:cNvGrpSpPr/>
+        <p:nvPr/>
+      </p:nvGrpSpPr>
+      <p:grpSpPr>
+        <a:xfrm>
+          <a:off x="0" y="0"/>
+          <a:ext cx="0" cy="0"/>
+          <a:chOff x="0" y="0"/>
+          <a:chExt cx="0" cy="0"/>
+        </a:xfrm>
+      </p:grpSpPr>
+      <p:sp>
+        <p:nvSpPr>
+          <p:cNvPr id="2" name="Text 0"/>
+          <p:cNvSpPr txBox="1"/>
+          <p:nvPr/>
+        </p:nvSpPr>
+        <p:spPr>
+          <a:xfrm>
+            <a:off x="548640" y="457200"/>
+            <a:ext cx="11064240" cy="5943600"/>
+          </a:xfrm>
+          <a:prstGeom prst="rect">
+            <a:avLst/>
+          </a:prstGeom>
+          <a:noFill/>
+          <a:ln/>
+        </p:spPr>
+        <p:txBody>
+          <a:bodyPr wrap="square" lIns="0" tIns="0" rIns="0" bIns="0" rtlCol="0" anchor="ctr"/>
+          <a:lstStyle/>
+          <a:p>
+            <a:pPr algn="ctr" indent="0" marL="0">
+              <a:buNone/>
+            </a:pPr>
+            <a:r>
+              <a:rPr lang="en-US" sz="4800" b="1" dirty="0">
+                <a:solidFill>
+                  <a:srgbClr val="FFFFFF"/>
+                </a:solidFill>
+                <a:latin typeface="Arial" pitchFamily="34" charset="0"/>
+                <a:ea typeface="Arial" pitchFamily="34" charset="-122"/>
+                <a:cs typeface="Arial" pitchFamily="34" charset="-120"/>
+              </a:rPr>
+              <a:t>Above all kingdoms, </a:t>
+            </a:r>
+            <a:endParaRPr lang="en-US" sz="4800" dirty="0"/>
+          </a:p>
+          <a:p>
+            <a:pPr algn="ctr" indent="0" marL="0">
+              <a:buNone/>
+            </a:pPr>
+            <a:r>
+              <a:rPr lang="en-US" sz="4800" b="1" dirty="0">
+                <a:solidFill>
+                  <a:srgbClr val="FFFFFF"/>
+                </a:solidFill>
+                <a:latin typeface="Arial" pitchFamily="34" charset="0"/>
+                <a:ea typeface="Arial" pitchFamily="34" charset="-122"/>
+                <a:cs typeface="Arial" pitchFamily="34" charset="-120"/>
+              </a:rPr>
+              <a:t>above all thrones</a:t>
+            </a:r>
+            <a:endParaRPr lang="en-US" sz="4800" dirty="0"/>
+          </a:p>
+          <a:p>
+            <a:pPr algn="ctr" indent="0" marL="0">
+              <a:buNone/>
+            </a:pPr>
+            <a:r>
+              <a:rPr lang="en-US" sz="4800" b="1" dirty="0">
+                <a:solidFill>
+                  <a:srgbClr val="FFFFFF"/>
+                </a:solidFill>
+                <a:latin typeface="Arial" pitchFamily="34" charset="0"/>
+                <a:ea typeface="Arial" pitchFamily="34" charset="-122"/>
+                <a:cs typeface="Arial" pitchFamily="34" charset="-120"/>
+              </a:rPr>
+              <a:t>Above all wonders </a:t>
+            </a:r>
+            <a:endParaRPr lang="en-US" sz="4800" dirty="0"/>
+          </a:p>
+          <a:p>
+            <a:pPr algn="ctr" indent="0" marL="0">
+              <a:buNone/>
+            </a:pPr>
+            <a:r>
+              <a:rPr lang="en-US" sz="4800" b="1" dirty="0">
+                <a:solidFill>
+                  <a:srgbClr val="FFFFFF"/>
+                </a:solidFill>
+                <a:latin typeface="Arial" pitchFamily="34" charset="0"/>
+                <a:ea typeface="Arial" pitchFamily="34" charset="-122"/>
+                <a:cs typeface="Arial" pitchFamily="34" charset="-120"/>
+              </a:rPr>
+              <a:t>the world has ever known</a:t>
             </a:r>
             <a:endParaRPr lang="en-US" sz="4800" dirty="0"/>
           </a:p>

--- a/fubc-en/2-Above All Powers.pptx
+++ b/fubc-en/2-Above All Powers.pptx
@@ -17,9 +17,10 @@
     <p:sldId id="265" r:id="rId11"/>
     <p:sldId id="266" r:id="rId12"/>
     <p:sldId id="267" r:id="rId13"/>
+    <p:sldId id="268" r:id="rId14"/>
   </p:sldIdLst>
   <p:notesMasterIdLst>
-    <p:notesMasterId r:id="rId14"/>
+    <p:notesMasterId r:id="rId15"/>
   </p:notesMasterIdLst>
   <p:sldSz cx="12192000" cy="6858000"/>
   <p:notesSz cx="6858000" cy="12192000"/>
@@ -801,6 +802,94 @@
             <a:fld id="{F7021451-1387-4CA6-816F-3879F97B5CBC}" type="slidenum">
               <a:rPr lang="en-US"/>
               <a:t>12</a:t>
+            </a:fld>
+            <a:endParaRPr lang="en-US"/>
+          </a:p>
+        </p:txBody>
+      </p:sp>
+    </p:spTree>
+    <p:extLst>
+      <p:ext uri="{BB962C8B-B14F-4D97-AF65-F5344CB8AC3E}">
+        <p14:creationId xmlns:p14="http://schemas.microsoft.com/office/powerpoint/2010/main" val="1024086991"/>
+      </p:ext>
+    </p:extLst>
+  </p:cSld>
+  <p:clrMapOvr>
+    <a:masterClrMapping/>
+  </p:clrMapOvr>
+</p:notes>
+</file>
+
+<file path=ppt/notesSlides/notesSlide13.xml><?xml version="1.0" encoding="utf-8"?>
+<p:notes xmlns:a="http://schemas.openxmlformats.org/drawingml/2006/main" xmlns:r="http://schemas.openxmlformats.org/officeDocument/2006/relationships" xmlns:p="http://schemas.openxmlformats.org/presentationml/2006/main">
+  <p:cSld>
+    <p:spTree>
+      <p:nvGrpSpPr>
+        <p:cNvPr id="1" name=""/>
+        <p:cNvGrpSpPr/>
+        <p:nvPr/>
+      </p:nvGrpSpPr>
+      <p:grpSpPr>
+        <a:xfrm>
+          <a:off x="0" y="0"/>
+          <a:ext cx="0" cy="0"/>
+          <a:chOff x="0" y="0"/>
+          <a:chExt cx="0" cy="0"/>
+        </a:xfrm>
+      </p:grpSpPr>
+      <p:sp>
+        <p:nvSpPr>
+          <p:cNvPr id="2" name="Slide Image Placeholder 1"/>
+          <p:cNvSpPr>
+            <a:spLocks noGrp="1" noRot="1" noChangeAspect="1"/>
+          </p:cNvSpPr>
+          <p:nvPr>
+            <p:ph type="sldImg"/>
+          </p:nvPr>
+        </p:nvSpPr>
+        <p:spPr/>
+      </p:sp>
+      <p:sp>
+        <p:nvSpPr>
+          <p:cNvPr id="3" name="Notes Placeholder 2"/>
+          <p:cNvSpPr>
+            <a:spLocks noGrp="1"/>
+          </p:cNvSpPr>
+          <p:nvPr>
+            <p:ph type="body" idx="1"/>
+          </p:nvPr>
+        </p:nvSpPr>
+        <p:spPr/>
+        <p:txBody>
+          <a:bodyPr/>
+          <a:lstStyle/>
+          <a:p>
+            <a:r>
+              <a:rPr lang="en-US" dirty="0"/>
+              <a:t/>
+            </a:r>
+            <a:endParaRPr lang="en-US" dirty="0"/>
+          </a:p>
+        </p:txBody>
+      </p:sp>
+      <p:sp>
+        <p:nvSpPr>
+          <p:cNvPr id="4" name="Slide Number Placeholder 3"/>
+          <p:cNvSpPr>
+            <a:spLocks noGrp="1"/>
+          </p:cNvSpPr>
+          <p:nvPr>
+            <p:ph type="sldNum" sz="quarter" idx="10"/>
+          </p:nvPr>
+        </p:nvSpPr>
+        <p:spPr/>
+        <p:txBody>
+          <a:bodyPr/>
+          <a:lstStyle/>
+          <a:p>
+            <a:fld id="{F7021451-1387-4CA6-816F-3879F97B5CBC}" type="slidenum">
+              <a:rPr lang="en-US"/>
+              <a:t>13</a:t>
             </a:fld>
             <a:endParaRPr lang="en-US"/>
           </a:p>
@@ -1958,7 +2047,7 @@
                 <a:ea typeface="Arial" pitchFamily="34" charset="-122"/>
                 <a:cs typeface="Arial" pitchFamily="34" charset="-120"/>
               </a:rPr>
-              <a:t>Above all wealth </a:t>
+              <a:t>Above all wealth</a:t>
             </a:r>
             <a:endParaRPr lang="en-US" sz="4800" dirty="0"/>
           </a:p>
@@ -1992,7 +2081,7 @@
                 <a:ea typeface="Arial" pitchFamily="34" charset="-122"/>
                 <a:cs typeface="Arial" pitchFamily="34" charset="-120"/>
               </a:rPr>
-              <a:t>There’s no way to measure </a:t>
+              <a:t>There’s no way to measure</a:t>
             </a:r>
             <a:endParaRPr lang="en-US" sz="4800" dirty="0"/>
           </a:p>
@@ -2009,7 +2098,7 @@
                 <a:ea typeface="Arial" pitchFamily="34" charset="-122"/>
                 <a:cs typeface="Arial" pitchFamily="34" charset="-120"/>
               </a:rPr>
-              <a:t>what you're worth</a:t>
+              <a:t>what You're worth</a:t>
             </a:r>
             <a:endParaRPr lang="en-US" sz="4800" dirty="0"/>
           </a:p>
@@ -2080,7 +2169,7 @@
                 <a:ea typeface="Arial" pitchFamily="34" charset="-122"/>
                 <a:cs typeface="Arial" pitchFamily="34" charset="-120"/>
               </a:rPr>
-              <a:t>CRUCIFIED, laid behind the stone</a:t>
+              <a:t>Crucified, laid behind the stone</a:t>
             </a:r>
             <a:endParaRPr lang="en-US" sz="4800" dirty="0"/>
           </a:p>
@@ -2202,7 +2291,7 @@
                 <a:ea typeface="Arial" pitchFamily="34" charset="-122"/>
                 <a:cs typeface="Arial" pitchFamily="34" charset="-120"/>
               </a:rPr>
-              <a:t>CRUCIFIED, laid behind the stone</a:t>
+              <a:t>Crucified, laid behind the stone</a:t>
             </a:r>
             <a:endParaRPr lang="en-US" sz="4800" dirty="0"/>
           </a:p>
@@ -2282,6 +2371,38 @@
           </a:p>
         </p:txBody>
       </p:sp>
+    </p:spTree>
+  </p:cSld>
+  <p:clrMapOvr>
+    <a:masterClrMapping/>
+  </p:clrMapOvr>
+</p:sld>
+</file>
+
+<file path=ppt/slides/slide13.xml><?xml version="1.0" encoding="utf-8"?>
+<p:sld xmlns:a="http://schemas.openxmlformats.org/drawingml/2006/main" xmlns:r="http://schemas.openxmlformats.org/officeDocument/2006/relationships" xmlns:p="http://schemas.openxmlformats.org/presentationml/2006/main">
+  <p:cSld name="Slide 13">
+    <p:bg>
+      <p:bgPr>
+        <a:solidFill>
+          <a:srgbClr val="000000"/>
+        </a:solidFill>
+      </p:bgPr>
+    </p:bg>
+    <p:spTree>
+      <p:nvGrpSpPr>
+        <p:cNvPr id="1" name=""/>
+        <p:cNvGrpSpPr/>
+        <p:nvPr/>
+      </p:nvGrpSpPr>
+      <p:grpSpPr>
+        <a:xfrm>
+          <a:off x="0" y="0"/>
+          <a:ext cx="0" cy="0"/>
+          <a:chOff x="0" y="0"/>
+          <a:chExt cx="0" cy="0"/>
+        </a:xfrm>
+      </p:grpSpPr>
     </p:spTree>
   </p:cSld>
   <p:clrMapOvr>
@@ -2347,7 +2468,7 @@
                 <a:ea typeface="Arial" pitchFamily="34" charset="-122"/>
                 <a:cs typeface="Arial" pitchFamily="34" charset="-120"/>
               </a:rPr>
-              <a:t>Above all powers, </a:t>
+              <a:t>Above all powers</a:t>
             </a:r>
             <a:endParaRPr lang="en-US" sz="4800" dirty="0"/>
           </a:p>
@@ -2381,7 +2502,7 @@
                 <a:ea typeface="Arial" pitchFamily="34" charset="-122"/>
                 <a:cs typeface="Arial" pitchFamily="34" charset="-120"/>
               </a:rPr>
-              <a:t>Above all nature </a:t>
+              <a:t>Above all nature</a:t>
             </a:r>
             <a:endParaRPr lang="en-US" sz="4800" dirty="0"/>
           </a:p>
@@ -2469,7 +2590,7 @@
                 <a:ea typeface="Arial" pitchFamily="34" charset="-122"/>
                 <a:cs typeface="Arial" pitchFamily="34" charset="-120"/>
               </a:rPr>
-              <a:t>Above all wisdom </a:t>
+              <a:t>Above all wisdom</a:t>
             </a:r>
             <a:endParaRPr lang="en-US" sz="4800" dirty="0"/>
           </a:p>
@@ -2486,7 +2607,7 @@
                 <a:ea typeface="Arial" pitchFamily="34" charset="-122"/>
                 <a:cs typeface="Arial" pitchFamily="34" charset="-120"/>
               </a:rPr>
-              <a:t>and all the ways of man.</a:t>
+              <a:t>and all the ways of man</a:t>
             </a:r>
             <a:endParaRPr lang="en-US" sz="4800" dirty="0"/>
           </a:p>
@@ -2503,7 +2624,7 @@
                 <a:ea typeface="Arial" pitchFamily="34" charset="-122"/>
                 <a:cs typeface="Arial" pitchFamily="34" charset="-120"/>
               </a:rPr>
-              <a:t>You were here </a:t>
+              <a:t>You were here</a:t>
             </a:r>
             <a:endParaRPr lang="en-US" sz="4800" dirty="0"/>
           </a:p>
@@ -2520,7 +2641,7 @@
                 <a:ea typeface="Arial" pitchFamily="34" charset="-122"/>
                 <a:cs typeface="Arial" pitchFamily="34" charset="-120"/>
               </a:rPr>
-              <a:t>before the world began.</a:t>
+              <a:t>before the world began</a:t>
             </a:r>
             <a:endParaRPr lang="en-US" sz="4800" dirty="0"/>
           </a:p>
@@ -2591,7 +2712,7 @@
                 <a:ea typeface="Arial" pitchFamily="34" charset="-122"/>
                 <a:cs typeface="Arial" pitchFamily="34" charset="-120"/>
               </a:rPr>
-              <a:t>Above all kingdoms, </a:t>
+              <a:t>Above all kingdoms</a:t>
             </a:r>
             <a:endParaRPr lang="en-US" sz="4800" dirty="0"/>
           </a:p>
@@ -2608,7 +2729,7 @@
                 <a:ea typeface="Arial" pitchFamily="34" charset="-122"/>
                 <a:cs typeface="Arial" pitchFamily="34" charset="-120"/>
               </a:rPr>
-              <a:t>above all thrones</a:t>
+              <a:t>Above all thrones</a:t>
             </a:r>
             <a:endParaRPr lang="en-US" sz="4800" dirty="0"/>
           </a:p>
@@ -2625,7 +2746,7 @@
                 <a:ea typeface="Arial" pitchFamily="34" charset="-122"/>
                 <a:cs typeface="Arial" pitchFamily="34" charset="-120"/>
               </a:rPr>
-              <a:t>Above all wonders </a:t>
+              <a:t>Above all wonders</a:t>
             </a:r>
             <a:endParaRPr lang="en-US" sz="4800" dirty="0"/>
           </a:p>
@@ -2713,7 +2834,7 @@
                 <a:ea typeface="Arial" pitchFamily="34" charset="-122"/>
                 <a:cs typeface="Arial" pitchFamily="34" charset="-120"/>
               </a:rPr>
-              <a:t>Above all wealth </a:t>
+              <a:t>Above all wealth</a:t>
             </a:r>
             <a:endParaRPr lang="en-US" sz="4800" dirty="0"/>
           </a:p>
@@ -2747,7 +2868,7 @@
                 <a:ea typeface="Arial" pitchFamily="34" charset="-122"/>
                 <a:cs typeface="Arial" pitchFamily="34" charset="-120"/>
               </a:rPr>
-              <a:t>There’s no way to measure </a:t>
+              <a:t>There’s no way to measure</a:t>
             </a:r>
             <a:endParaRPr lang="en-US" sz="4800" dirty="0"/>
           </a:p>
@@ -2764,7 +2885,7 @@
                 <a:ea typeface="Arial" pitchFamily="34" charset="-122"/>
                 <a:cs typeface="Arial" pitchFamily="34" charset="-120"/>
               </a:rPr>
-              <a:t>what you're worth</a:t>
+              <a:t>what You're worth</a:t>
             </a:r>
             <a:endParaRPr lang="en-US" sz="4800" dirty="0"/>
           </a:p>
@@ -2835,7 +2956,7 @@
                 <a:ea typeface="Arial" pitchFamily="34" charset="-122"/>
                 <a:cs typeface="Arial" pitchFamily="34" charset="-120"/>
               </a:rPr>
-              <a:t>CRUCIFIED, laid behind the stone</a:t>
+              <a:t>Crucified, laid behind the stone</a:t>
             </a:r>
             <a:endParaRPr lang="en-US" sz="4800" dirty="0"/>
           </a:p>
@@ -2957,7 +3078,7 @@
                 <a:ea typeface="Arial" pitchFamily="34" charset="-122"/>
                 <a:cs typeface="Arial" pitchFamily="34" charset="-120"/>
               </a:rPr>
-              <a:t>Above all powers, </a:t>
+              <a:t>Above all powers</a:t>
             </a:r>
             <a:endParaRPr lang="en-US" sz="4800" dirty="0"/>
           </a:p>
@@ -2991,7 +3112,7 @@
                 <a:ea typeface="Arial" pitchFamily="34" charset="-122"/>
                 <a:cs typeface="Arial" pitchFamily="34" charset="-120"/>
               </a:rPr>
-              <a:t>Above all nature </a:t>
+              <a:t>Above all nature</a:t>
             </a:r>
             <a:endParaRPr lang="en-US" sz="4800" dirty="0"/>
           </a:p>
@@ -3079,7 +3200,7 @@
                 <a:ea typeface="Arial" pitchFamily="34" charset="-122"/>
                 <a:cs typeface="Arial" pitchFamily="34" charset="-120"/>
               </a:rPr>
-              <a:t>Above all wisdom </a:t>
+              <a:t>Above all wisdom</a:t>
             </a:r>
             <a:endParaRPr lang="en-US" sz="4800" dirty="0"/>
           </a:p>
@@ -3096,7 +3217,7 @@
                 <a:ea typeface="Arial" pitchFamily="34" charset="-122"/>
                 <a:cs typeface="Arial" pitchFamily="34" charset="-120"/>
               </a:rPr>
-              <a:t>and all the ways of man.</a:t>
+              <a:t>and all the ways of man</a:t>
             </a:r>
             <a:endParaRPr lang="en-US" sz="4800" dirty="0"/>
           </a:p>
@@ -3113,7 +3234,7 @@
                 <a:ea typeface="Arial" pitchFamily="34" charset="-122"/>
                 <a:cs typeface="Arial" pitchFamily="34" charset="-120"/>
               </a:rPr>
-              <a:t>You were here </a:t>
+              <a:t>You were here</a:t>
             </a:r>
             <a:endParaRPr lang="en-US" sz="4800" dirty="0"/>
           </a:p>
@@ -3130,7 +3251,7 @@
                 <a:ea typeface="Arial" pitchFamily="34" charset="-122"/>
                 <a:cs typeface="Arial" pitchFamily="34" charset="-120"/>
               </a:rPr>
-              <a:t>before the world began.</a:t>
+              <a:t>before the world began</a:t>
             </a:r>
             <a:endParaRPr lang="en-US" sz="4800" dirty="0"/>
           </a:p>
@@ -3201,7 +3322,7 @@
                 <a:ea typeface="Arial" pitchFamily="34" charset="-122"/>
                 <a:cs typeface="Arial" pitchFamily="34" charset="-120"/>
               </a:rPr>
-              <a:t>Above all kingdoms, </a:t>
+              <a:t>Above all kingdoms</a:t>
             </a:r>
             <a:endParaRPr lang="en-US" sz="4800" dirty="0"/>
           </a:p>
@@ -3235,7 +3356,7 @@
                 <a:ea typeface="Arial" pitchFamily="34" charset="-122"/>
                 <a:cs typeface="Arial" pitchFamily="34" charset="-120"/>
               </a:rPr>
-              <a:t>Above all wonders </a:t>
+              <a:t>Above all wonders</a:t>
             </a:r>
             <a:endParaRPr lang="en-US" sz="4800" dirty="0"/>
           </a:p>

--- a/fubc-en/2-Above All Powers.pptx
+++ b/fubc-en/2-Above All Powers.pptx
@@ -514,7 +514,7 @@
           <a:p>
             <a:r>
               <a:rPr lang="en-US" dirty="0"/>
-              <a:t/>
+              <a:t>T · 1/1</a:t>
             </a:r>
             <a:endParaRPr lang="en-US" dirty="0"/>
           </a:p>
@@ -602,7 +602,7 @@
           <a:p>
             <a:r>
               <a:rPr lang="en-US" dirty="0"/>
-              <a:t/>
+              <a:t>2 · 4/4</a:t>
             </a:r>
             <a:endParaRPr lang="en-US" dirty="0"/>
           </a:p>
@@ -690,7 +690,7 @@
           <a:p>
             <a:r>
               <a:rPr lang="en-US" dirty="0"/>
-              <a:t/>
+              <a:t>P · 1/1</a:t>
             </a:r>
             <a:endParaRPr lang="en-US" dirty="0"/>
           </a:p>
@@ -778,7 +778,7 @@
           <a:p>
             <a:r>
               <a:rPr lang="en-US" dirty="0"/>
-              <a:t/>
+              <a:t>P · 1/1</a:t>
             </a:r>
             <a:endParaRPr lang="en-US" dirty="0"/>
           </a:p>
@@ -954,7 +954,7 @@
           <a:p>
             <a:r>
               <a:rPr lang="en-US" dirty="0"/>
-              <a:t/>
+              <a:t>1 · 1/4</a:t>
             </a:r>
             <a:endParaRPr lang="en-US" dirty="0"/>
           </a:p>
@@ -1042,7 +1042,7 @@
           <a:p>
             <a:r>
               <a:rPr lang="en-US" dirty="0"/>
-              <a:t/>
+              <a:t>1 · 2/4</a:t>
             </a:r>
             <a:endParaRPr lang="en-US" dirty="0"/>
           </a:p>
@@ -1130,7 +1130,7 @@
           <a:p>
             <a:r>
               <a:rPr lang="en-US" dirty="0"/>
-              <a:t/>
+              <a:t>1 · 3/4</a:t>
             </a:r>
             <a:endParaRPr lang="en-US" dirty="0"/>
           </a:p>
@@ -1218,7 +1218,7 @@
           <a:p>
             <a:r>
               <a:rPr lang="en-US" dirty="0"/>
-              <a:t/>
+              <a:t>1 · 4/4</a:t>
             </a:r>
             <a:endParaRPr lang="en-US" dirty="0"/>
           </a:p>
@@ -1306,7 +1306,7 @@
           <a:p>
             <a:r>
               <a:rPr lang="en-US" dirty="0"/>
-              <a:t/>
+              <a:t>P · 1/1</a:t>
             </a:r>
             <a:endParaRPr lang="en-US" dirty="0"/>
           </a:p>
@@ -1394,7 +1394,7 @@
           <a:p>
             <a:r>
               <a:rPr lang="en-US" dirty="0"/>
-              <a:t/>
+              <a:t>2 · 1/4</a:t>
             </a:r>
             <a:endParaRPr lang="en-US" dirty="0"/>
           </a:p>
@@ -1482,7 +1482,7 @@
           <a:p>
             <a:r>
               <a:rPr lang="en-US" dirty="0"/>
-              <a:t/>
+              <a:t>2 · 2/4</a:t>
             </a:r>
             <a:endParaRPr lang="en-US" dirty="0"/>
           </a:p>
@@ -1570,7 +1570,7 @@
           <a:p>
             <a:r>
               <a:rPr lang="en-US" dirty="0"/>
-              <a:t/>
+              <a:t>2 · 3/4</a:t>
             </a:r>
             <a:endParaRPr lang="en-US" dirty="0"/>
           </a:p>
@@ -1968,7 +1968,7 @@
               <a:buNone/>
             </a:pPr>
             <a:r>
-              <a:rPr lang="en-US" sz="4800" b="1" dirty="0">
+              <a:rPr lang="en-US" sz="5000" b="1" dirty="0">
                 <a:solidFill>
                   <a:srgbClr val="FFFFFF"/>
                 </a:solidFill>
@@ -1978,7 +1978,7 @@
               </a:rPr>
               <a:t>Above All Powers</a:t>
             </a:r>
-            <a:endParaRPr lang="en-US" sz="4800" dirty="0"/>
+            <a:endParaRPr lang="en-US" sz="5000" dirty="0"/>
           </a:p>
         </p:txBody>
       </p:sp>
@@ -2039,7 +2039,7 @@
               <a:buNone/>
             </a:pPr>
             <a:r>
-              <a:rPr lang="en-US" sz="4800" b="1" dirty="0">
+              <a:rPr lang="en-US" sz="5000" b="1" dirty="0">
                 <a:solidFill>
                   <a:srgbClr val="FFFFFF"/>
                 </a:solidFill>
@@ -2049,14 +2049,14 @@
               </a:rPr>
               <a:t>Above all wealth</a:t>
             </a:r>
-            <a:endParaRPr lang="en-US" sz="4800" dirty="0"/>
-          </a:p>
-          <a:p>
-            <a:pPr algn="ctr" indent="0" marL="0">
-              <a:buNone/>
-            </a:pPr>
-            <a:r>
-              <a:rPr lang="en-US" sz="4800" b="1" dirty="0">
+            <a:endParaRPr lang="en-US" sz="5000" dirty="0"/>
+          </a:p>
+          <a:p>
+            <a:pPr algn="ctr" indent="0" marL="0">
+              <a:buNone/>
+            </a:pPr>
+            <a:r>
+              <a:rPr lang="en-US" sz="5000" b="1" dirty="0">
                 <a:solidFill>
                   <a:srgbClr val="FFFFFF"/>
                 </a:solidFill>
@@ -2066,14 +2066,14 @@
               </a:rPr>
               <a:t>and treasures of the earth</a:t>
             </a:r>
-            <a:endParaRPr lang="en-US" sz="4800" dirty="0"/>
-          </a:p>
-          <a:p>
-            <a:pPr algn="ctr" indent="0" marL="0">
-              <a:buNone/>
-            </a:pPr>
-            <a:r>
-              <a:rPr lang="en-US" sz="4800" b="1" dirty="0">
+            <a:endParaRPr lang="en-US" sz="5000" dirty="0"/>
+          </a:p>
+          <a:p>
+            <a:pPr algn="ctr" indent="0" marL="0">
+              <a:buNone/>
+            </a:pPr>
+            <a:r>
+              <a:rPr lang="en-US" sz="5000" b="1" dirty="0">
                 <a:solidFill>
                   <a:srgbClr val="FFFFFF"/>
                 </a:solidFill>
@@ -2083,14 +2083,14 @@
               </a:rPr>
               <a:t>There’s no way to measure</a:t>
             </a:r>
-            <a:endParaRPr lang="en-US" sz="4800" dirty="0"/>
-          </a:p>
-          <a:p>
-            <a:pPr algn="ctr" indent="0" marL="0">
-              <a:buNone/>
-            </a:pPr>
-            <a:r>
-              <a:rPr lang="en-US" sz="4800" b="1" dirty="0">
+            <a:endParaRPr lang="en-US" sz="5000" dirty="0"/>
+          </a:p>
+          <a:p>
+            <a:pPr algn="ctr" indent="0" marL="0">
+              <a:buNone/>
+            </a:pPr>
+            <a:r>
+              <a:rPr lang="en-US" sz="5000" b="1" dirty="0">
                 <a:solidFill>
                   <a:srgbClr val="FFFFFF"/>
                 </a:solidFill>
@@ -2100,7 +2100,46 @@
               </a:rPr>
               <a:t>what You're worth</a:t>
             </a:r>
-            <a:endParaRPr lang="en-US" sz="4800" dirty="0"/>
+            <a:endParaRPr lang="en-US" sz="5000" dirty="0"/>
+          </a:p>
+        </p:txBody>
+      </p:sp>
+      <p:sp>
+        <p:nvSpPr>
+          <p:cNvPr id="3" name="Text 1"/>
+          <p:cNvSpPr txBox="1"/>
+          <p:nvPr/>
+        </p:nvSpPr>
+        <p:spPr>
+          <a:xfrm>
+            <a:off x="9235440" y="6126480"/>
+            <a:ext cx="2743200" cy="548640"/>
+          </a:xfrm>
+          <a:prstGeom prst="rect">
+            <a:avLst/>
+          </a:prstGeom>
+          <a:noFill/>
+          <a:ln/>
+        </p:spPr>
+        <p:txBody>
+          <a:bodyPr wrap="square" lIns="0" tIns="0" rIns="0" bIns="0" rtlCol="0" anchor="ctr"/>
+          <a:lstStyle/>
+          <a:p>
+            <a:pPr algn="r" indent="0" marL="0">
+              <a:buNone/>
+            </a:pPr>
+            <a:r>
+              <a:rPr lang="en-US" sz="2400" dirty="0">
+                <a:solidFill>
+                  <a:srgbClr val="8A8A8A"/>
+                </a:solidFill>
+                <a:latin typeface="Arial" pitchFamily="34" charset="0"/>
+                <a:ea typeface="Arial" pitchFamily="34" charset="-122"/>
+                <a:cs typeface="Arial" pitchFamily="34" charset="-120"/>
+              </a:rPr>
+              <a:t>○ ○ ○ ●</a:t>
+            </a:r>
+            <a:endParaRPr lang="en-US" sz="2400" dirty="0"/>
           </a:p>
         </p:txBody>
       </p:sp>
@@ -2161,7 +2200,7 @@
               <a:buNone/>
             </a:pPr>
             <a:r>
-              <a:rPr lang="en-US" sz="4800" b="1" i="1" dirty="0">
+              <a:rPr lang="en-US" sz="5000" b="1" i="1" dirty="0">
                 <a:solidFill>
                   <a:srgbClr val="FFFFFF"/>
                 </a:solidFill>
@@ -2171,14 +2210,14 @@
               </a:rPr>
               <a:t>Crucified, laid behind the stone</a:t>
             </a:r>
-            <a:endParaRPr lang="en-US" sz="4800" dirty="0"/>
-          </a:p>
-          <a:p>
-            <a:pPr algn="ctr" indent="0" marL="0">
-              <a:buNone/>
-            </a:pPr>
-            <a:r>
-              <a:rPr lang="en-US" sz="4800" b="1" i="1" dirty="0">
+            <a:endParaRPr lang="en-US" sz="5000" dirty="0"/>
+          </a:p>
+          <a:p>
+            <a:pPr algn="ctr" indent="0" marL="0">
+              <a:buNone/>
+            </a:pPr>
+            <a:r>
+              <a:rPr lang="en-US" sz="5000" b="1" i="1" dirty="0">
                 <a:solidFill>
                   <a:srgbClr val="FFFFFF"/>
                 </a:solidFill>
@@ -2188,14 +2227,14 @@
               </a:rPr>
               <a:t>You lived to die, rejected and alone</a:t>
             </a:r>
-            <a:endParaRPr lang="en-US" sz="4800" dirty="0"/>
-          </a:p>
-          <a:p>
-            <a:pPr algn="ctr" indent="0" marL="0">
-              <a:buNone/>
-            </a:pPr>
-            <a:r>
-              <a:rPr lang="en-US" sz="4800" b="1" i="1" dirty="0">
+            <a:endParaRPr lang="en-US" sz="5000" dirty="0"/>
+          </a:p>
+          <a:p>
+            <a:pPr algn="ctr" indent="0" marL="0">
+              <a:buNone/>
+            </a:pPr>
+            <a:r>
+              <a:rPr lang="en-US" sz="5000" b="1" i="1" dirty="0">
                 <a:solidFill>
                   <a:srgbClr val="FFFFFF"/>
                 </a:solidFill>
@@ -2205,14 +2244,14 @@
               </a:rPr>
               <a:t>Like a rose, trampled on the ground</a:t>
             </a:r>
-            <a:endParaRPr lang="en-US" sz="4800" dirty="0"/>
-          </a:p>
-          <a:p>
-            <a:pPr algn="ctr" indent="0" marL="0">
-              <a:buNone/>
-            </a:pPr>
-            <a:r>
-              <a:rPr lang="en-US" sz="4800" b="1" i="1" dirty="0">
+            <a:endParaRPr lang="en-US" sz="5000" dirty="0"/>
+          </a:p>
+          <a:p>
+            <a:pPr algn="ctr" indent="0" marL="0">
+              <a:buNone/>
+            </a:pPr>
+            <a:r>
+              <a:rPr lang="en-US" sz="5000" b="1" i="1" dirty="0">
                 <a:solidFill>
                   <a:srgbClr val="FFFFFF"/>
                 </a:solidFill>
@@ -2222,7 +2261,7 @@
               </a:rPr>
               <a:t>You took the fall, and thought of me above all</a:t>
             </a:r>
-            <a:endParaRPr lang="en-US" sz="4800" dirty="0"/>
+            <a:endParaRPr lang="en-US" sz="5000" dirty="0"/>
           </a:p>
         </p:txBody>
       </p:sp>
@@ -2283,7 +2322,7 @@
               <a:buNone/>
             </a:pPr>
             <a:r>
-              <a:rPr lang="en-US" sz="4800" b="1" i="1" dirty="0">
+              <a:rPr lang="en-US" sz="5000" b="1" i="1" dirty="0">
                 <a:solidFill>
                   <a:srgbClr val="FFFFFF"/>
                 </a:solidFill>
@@ -2293,14 +2332,14 @@
               </a:rPr>
               <a:t>Crucified, laid behind the stone</a:t>
             </a:r>
-            <a:endParaRPr lang="en-US" sz="4800" dirty="0"/>
-          </a:p>
-          <a:p>
-            <a:pPr algn="ctr" indent="0" marL="0">
-              <a:buNone/>
-            </a:pPr>
-            <a:r>
-              <a:rPr lang="en-US" sz="4800" b="1" i="1" dirty="0">
+            <a:endParaRPr lang="en-US" sz="5000" dirty="0"/>
+          </a:p>
+          <a:p>
+            <a:pPr algn="ctr" indent="0" marL="0">
+              <a:buNone/>
+            </a:pPr>
+            <a:r>
+              <a:rPr lang="en-US" sz="5000" b="1" i="1" dirty="0">
                 <a:solidFill>
                   <a:srgbClr val="FFFFFF"/>
                 </a:solidFill>
@@ -2310,14 +2349,14 @@
               </a:rPr>
               <a:t>You lived to die, rejected and alone</a:t>
             </a:r>
-            <a:endParaRPr lang="en-US" sz="4800" dirty="0"/>
-          </a:p>
-          <a:p>
-            <a:pPr algn="ctr" indent="0" marL="0">
-              <a:buNone/>
-            </a:pPr>
-            <a:r>
-              <a:rPr lang="en-US" sz="4800" b="1" i="1" dirty="0">
+            <a:endParaRPr lang="en-US" sz="5000" dirty="0"/>
+          </a:p>
+          <a:p>
+            <a:pPr algn="ctr" indent="0" marL="0">
+              <a:buNone/>
+            </a:pPr>
+            <a:r>
+              <a:rPr lang="en-US" sz="5000" b="1" i="1" dirty="0">
                 <a:solidFill>
                   <a:srgbClr val="FFFFFF"/>
                 </a:solidFill>
@@ -2327,14 +2366,14 @@
               </a:rPr>
               <a:t>Like a rose, trampled on the ground</a:t>
             </a:r>
-            <a:endParaRPr lang="en-US" sz="4800" dirty="0"/>
-          </a:p>
-          <a:p>
-            <a:pPr algn="ctr" indent="0" marL="0">
-              <a:buNone/>
-            </a:pPr>
-            <a:r>
-              <a:rPr lang="en-US" sz="4800" b="1" i="1" dirty="0">
+            <a:endParaRPr lang="en-US" sz="5000" dirty="0"/>
+          </a:p>
+          <a:p>
+            <a:pPr algn="ctr" indent="0" marL="0">
+              <a:buNone/>
+            </a:pPr>
+            <a:r>
+              <a:rPr lang="en-US" sz="5000" b="1" i="1" dirty="0">
                 <a:solidFill>
                   <a:srgbClr val="FFFFFF"/>
                 </a:solidFill>
@@ -2344,20 +2383,20 @@
               </a:rPr>
               <a:t>You took the fall, and thought of me above all</a:t>
             </a:r>
-            <a:endParaRPr lang="en-US" sz="4800" dirty="0"/>
-          </a:p>
-          <a:p>
-            <a:pPr algn="ctr" indent="0" marL="0">
-              <a:buNone/>
-            </a:pPr>
-            <a:endParaRPr lang="en-US" sz="4800" dirty="0"/>
-          </a:p>
-          <a:p>
-            <a:pPr algn="ctr" indent="0" marL="0">
-              <a:buNone/>
-            </a:pPr>
-            <a:r>
-              <a:rPr lang="en-US" sz="4800" b="1" i="1" dirty="0">
+            <a:endParaRPr lang="en-US" sz="5000" dirty="0"/>
+          </a:p>
+          <a:p>
+            <a:pPr algn="ctr" indent="0" marL="0">
+              <a:buNone/>
+            </a:pPr>
+            <a:endParaRPr lang="en-US" sz="5000" dirty="0"/>
+          </a:p>
+          <a:p>
+            <a:pPr algn="ctr" indent="0" marL="0">
+              <a:buNone/>
+            </a:pPr>
+            <a:r>
+              <a:rPr lang="en-US" sz="5000" b="1" i="1" dirty="0">
                 <a:solidFill>
                   <a:srgbClr val="FFFFFF"/>
                 </a:solidFill>
@@ -2367,7 +2406,7 @@
               </a:rPr>
               <a:t>***</a:t>
             </a:r>
-            <a:endParaRPr lang="en-US" sz="4800" dirty="0"/>
+            <a:endParaRPr lang="en-US" sz="5000" dirty="0"/>
           </a:p>
         </p:txBody>
       </p:sp>
@@ -2460,7 +2499,7 @@
               <a:buNone/>
             </a:pPr>
             <a:r>
-              <a:rPr lang="en-US" sz="4800" b="1" dirty="0">
+              <a:rPr lang="en-US" sz="5000" b="1" dirty="0">
                 <a:solidFill>
                   <a:srgbClr val="FFFFFF"/>
                 </a:solidFill>
@@ -2470,14 +2509,14 @@
               </a:rPr>
               <a:t>Above all powers</a:t>
             </a:r>
-            <a:endParaRPr lang="en-US" sz="4800" dirty="0"/>
-          </a:p>
-          <a:p>
-            <a:pPr algn="ctr" indent="0" marL="0">
-              <a:buNone/>
-            </a:pPr>
-            <a:r>
-              <a:rPr lang="en-US" sz="4800" b="1" dirty="0">
+            <a:endParaRPr lang="en-US" sz="5000" dirty="0"/>
+          </a:p>
+          <a:p>
+            <a:pPr algn="ctr" indent="0" marL="0">
+              <a:buNone/>
+            </a:pPr>
+            <a:r>
+              <a:rPr lang="en-US" sz="5000" b="1" dirty="0">
                 <a:solidFill>
                   <a:srgbClr val="FFFFFF"/>
                 </a:solidFill>
@@ -2487,14 +2526,14 @@
               </a:rPr>
               <a:t>above all kings</a:t>
             </a:r>
-            <a:endParaRPr lang="en-US" sz="4800" dirty="0"/>
-          </a:p>
-          <a:p>
-            <a:pPr algn="ctr" indent="0" marL="0">
-              <a:buNone/>
-            </a:pPr>
-            <a:r>
-              <a:rPr lang="en-US" sz="4800" b="1" dirty="0">
+            <a:endParaRPr lang="en-US" sz="5000" dirty="0"/>
+          </a:p>
+          <a:p>
+            <a:pPr algn="ctr" indent="0" marL="0">
+              <a:buNone/>
+            </a:pPr>
+            <a:r>
+              <a:rPr lang="en-US" sz="5000" b="1" dirty="0">
                 <a:solidFill>
                   <a:srgbClr val="FFFFFF"/>
                 </a:solidFill>
@@ -2504,14 +2543,14 @@
               </a:rPr>
               <a:t>Above all nature</a:t>
             </a:r>
-            <a:endParaRPr lang="en-US" sz="4800" dirty="0"/>
-          </a:p>
-          <a:p>
-            <a:pPr algn="ctr" indent="0" marL="0">
-              <a:buNone/>
-            </a:pPr>
-            <a:r>
-              <a:rPr lang="en-US" sz="4800" b="1" dirty="0">
+            <a:endParaRPr lang="en-US" sz="5000" dirty="0"/>
+          </a:p>
+          <a:p>
+            <a:pPr algn="ctr" indent="0" marL="0">
+              <a:buNone/>
+            </a:pPr>
+            <a:r>
+              <a:rPr lang="en-US" sz="5000" b="1" dirty="0">
                 <a:solidFill>
                   <a:srgbClr val="FFFFFF"/>
                 </a:solidFill>
@@ -2521,7 +2560,46 @@
               </a:rPr>
               <a:t>and all created things</a:t>
             </a:r>
-            <a:endParaRPr lang="en-US" sz="4800" dirty="0"/>
+            <a:endParaRPr lang="en-US" sz="5000" dirty="0"/>
+          </a:p>
+        </p:txBody>
+      </p:sp>
+      <p:sp>
+        <p:nvSpPr>
+          <p:cNvPr id="3" name="Text 1"/>
+          <p:cNvSpPr txBox="1"/>
+          <p:nvPr/>
+        </p:nvSpPr>
+        <p:spPr>
+          <a:xfrm>
+            <a:off x="9235440" y="6126480"/>
+            <a:ext cx="2743200" cy="548640"/>
+          </a:xfrm>
+          <a:prstGeom prst="rect">
+            <a:avLst/>
+          </a:prstGeom>
+          <a:noFill/>
+          <a:ln/>
+        </p:spPr>
+        <p:txBody>
+          <a:bodyPr wrap="square" lIns="0" tIns="0" rIns="0" bIns="0" rtlCol="0" anchor="ctr"/>
+          <a:lstStyle/>
+          <a:p>
+            <a:pPr algn="r" indent="0" marL="0">
+              <a:buNone/>
+            </a:pPr>
+            <a:r>
+              <a:rPr lang="en-US" sz="2400" dirty="0">
+                <a:solidFill>
+                  <a:srgbClr val="8A8A8A"/>
+                </a:solidFill>
+                <a:latin typeface="Arial" pitchFamily="34" charset="0"/>
+                <a:ea typeface="Arial" pitchFamily="34" charset="-122"/>
+                <a:cs typeface="Arial" pitchFamily="34" charset="-120"/>
+              </a:rPr>
+              <a:t>● ○ ○ ○</a:t>
+            </a:r>
+            <a:endParaRPr lang="en-US" sz="2400" dirty="0"/>
           </a:p>
         </p:txBody>
       </p:sp>
@@ -2582,7 +2660,7 @@
               <a:buNone/>
             </a:pPr>
             <a:r>
-              <a:rPr lang="en-US" sz="4800" b="1" dirty="0">
+              <a:rPr lang="en-US" sz="5000" b="1" dirty="0">
                 <a:solidFill>
                   <a:srgbClr val="FFFFFF"/>
                 </a:solidFill>
@@ -2592,14 +2670,14 @@
               </a:rPr>
               <a:t>Above all wisdom</a:t>
             </a:r>
-            <a:endParaRPr lang="en-US" sz="4800" dirty="0"/>
-          </a:p>
-          <a:p>
-            <a:pPr algn="ctr" indent="0" marL="0">
-              <a:buNone/>
-            </a:pPr>
-            <a:r>
-              <a:rPr lang="en-US" sz="4800" b="1" dirty="0">
+            <a:endParaRPr lang="en-US" sz="5000" dirty="0"/>
+          </a:p>
+          <a:p>
+            <a:pPr algn="ctr" indent="0" marL="0">
+              <a:buNone/>
+            </a:pPr>
+            <a:r>
+              <a:rPr lang="en-US" sz="5000" b="1" dirty="0">
                 <a:solidFill>
                   <a:srgbClr val="FFFFFF"/>
                 </a:solidFill>
@@ -2609,14 +2687,14 @@
               </a:rPr>
               <a:t>and all the ways of man</a:t>
             </a:r>
-            <a:endParaRPr lang="en-US" sz="4800" dirty="0"/>
-          </a:p>
-          <a:p>
-            <a:pPr algn="ctr" indent="0" marL="0">
-              <a:buNone/>
-            </a:pPr>
-            <a:r>
-              <a:rPr lang="en-US" sz="4800" b="1" dirty="0">
+            <a:endParaRPr lang="en-US" sz="5000" dirty="0"/>
+          </a:p>
+          <a:p>
+            <a:pPr algn="ctr" indent="0" marL="0">
+              <a:buNone/>
+            </a:pPr>
+            <a:r>
+              <a:rPr lang="en-US" sz="5000" b="1" dirty="0">
                 <a:solidFill>
                   <a:srgbClr val="FFFFFF"/>
                 </a:solidFill>
@@ -2626,14 +2704,14 @@
               </a:rPr>
               <a:t>You were here</a:t>
             </a:r>
-            <a:endParaRPr lang="en-US" sz="4800" dirty="0"/>
-          </a:p>
-          <a:p>
-            <a:pPr algn="ctr" indent="0" marL="0">
-              <a:buNone/>
-            </a:pPr>
-            <a:r>
-              <a:rPr lang="en-US" sz="4800" b="1" dirty="0">
+            <a:endParaRPr lang="en-US" sz="5000" dirty="0"/>
+          </a:p>
+          <a:p>
+            <a:pPr algn="ctr" indent="0" marL="0">
+              <a:buNone/>
+            </a:pPr>
+            <a:r>
+              <a:rPr lang="en-US" sz="5000" b="1" dirty="0">
                 <a:solidFill>
                   <a:srgbClr val="FFFFFF"/>
                 </a:solidFill>
@@ -2643,7 +2721,46 @@
               </a:rPr>
               <a:t>before the world began</a:t>
             </a:r>
-            <a:endParaRPr lang="en-US" sz="4800" dirty="0"/>
+            <a:endParaRPr lang="en-US" sz="5000" dirty="0"/>
+          </a:p>
+        </p:txBody>
+      </p:sp>
+      <p:sp>
+        <p:nvSpPr>
+          <p:cNvPr id="3" name="Text 1"/>
+          <p:cNvSpPr txBox="1"/>
+          <p:nvPr/>
+        </p:nvSpPr>
+        <p:spPr>
+          <a:xfrm>
+            <a:off x="9235440" y="6126480"/>
+            <a:ext cx="2743200" cy="548640"/>
+          </a:xfrm>
+          <a:prstGeom prst="rect">
+            <a:avLst/>
+          </a:prstGeom>
+          <a:noFill/>
+          <a:ln/>
+        </p:spPr>
+        <p:txBody>
+          <a:bodyPr wrap="square" lIns="0" tIns="0" rIns="0" bIns="0" rtlCol="0" anchor="ctr"/>
+          <a:lstStyle/>
+          <a:p>
+            <a:pPr algn="r" indent="0" marL="0">
+              <a:buNone/>
+            </a:pPr>
+            <a:r>
+              <a:rPr lang="en-US" sz="2400" dirty="0">
+                <a:solidFill>
+                  <a:srgbClr val="8A8A8A"/>
+                </a:solidFill>
+                <a:latin typeface="Arial" pitchFamily="34" charset="0"/>
+                <a:ea typeface="Arial" pitchFamily="34" charset="-122"/>
+                <a:cs typeface="Arial" pitchFamily="34" charset="-120"/>
+              </a:rPr>
+              <a:t>○ ● ○ ○</a:t>
+            </a:r>
+            <a:endParaRPr lang="en-US" sz="2400" dirty="0"/>
           </a:p>
         </p:txBody>
       </p:sp>
@@ -2704,7 +2821,7 @@
               <a:buNone/>
             </a:pPr>
             <a:r>
-              <a:rPr lang="en-US" sz="4800" b="1" dirty="0">
+              <a:rPr lang="en-US" sz="5000" b="1" dirty="0">
                 <a:solidFill>
                   <a:srgbClr val="FFFFFF"/>
                 </a:solidFill>
@@ -2714,14 +2831,14 @@
               </a:rPr>
               <a:t>Above all kingdoms</a:t>
             </a:r>
-            <a:endParaRPr lang="en-US" sz="4800" dirty="0"/>
-          </a:p>
-          <a:p>
-            <a:pPr algn="ctr" indent="0" marL="0">
-              <a:buNone/>
-            </a:pPr>
-            <a:r>
-              <a:rPr lang="en-US" sz="4800" b="1" dirty="0">
+            <a:endParaRPr lang="en-US" sz="5000" dirty="0"/>
+          </a:p>
+          <a:p>
+            <a:pPr algn="ctr" indent="0" marL="0">
+              <a:buNone/>
+            </a:pPr>
+            <a:r>
+              <a:rPr lang="en-US" sz="5000" b="1" dirty="0">
                 <a:solidFill>
                   <a:srgbClr val="FFFFFF"/>
                 </a:solidFill>
@@ -2731,14 +2848,14 @@
               </a:rPr>
               <a:t>Above all thrones</a:t>
             </a:r>
-            <a:endParaRPr lang="en-US" sz="4800" dirty="0"/>
-          </a:p>
-          <a:p>
-            <a:pPr algn="ctr" indent="0" marL="0">
-              <a:buNone/>
-            </a:pPr>
-            <a:r>
-              <a:rPr lang="en-US" sz="4800" b="1" dirty="0">
+            <a:endParaRPr lang="en-US" sz="5000" dirty="0"/>
+          </a:p>
+          <a:p>
+            <a:pPr algn="ctr" indent="0" marL="0">
+              <a:buNone/>
+            </a:pPr>
+            <a:r>
+              <a:rPr lang="en-US" sz="5000" b="1" dirty="0">
                 <a:solidFill>
                   <a:srgbClr val="FFFFFF"/>
                 </a:solidFill>
@@ -2748,14 +2865,14 @@
               </a:rPr>
               <a:t>Above all wonders</a:t>
             </a:r>
-            <a:endParaRPr lang="en-US" sz="4800" dirty="0"/>
-          </a:p>
-          <a:p>
-            <a:pPr algn="ctr" indent="0" marL="0">
-              <a:buNone/>
-            </a:pPr>
-            <a:r>
-              <a:rPr lang="en-US" sz="4800" b="1" dirty="0">
+            <a:endParaRPr lang="en-US" sz="5000" dirty="0"/>
+          </a:p>
+          <a:p>
+            <a:pPr algn="ctr" indent="0" marL="0">
+              <a:buNone/>
+            </a:pPr>
+            <a:r>
+              <a:rPr lang="en-US" sz="5000" b="1" dirty="0">
                 <a:solidFill>
                   <a:srgbClr val="FFFFFF"/>
                 </a:solidFill>
@@ -2765,7 +2882,46 @@
               </a:rPr>
               <a:t>the world has ever known</a:t>
             </a:r>
-            <a:endParaRPr lang="en-US" sz="4800" dirty="0"/>
+            <a:endParaRPr lang="en-US" sz="5000" dirty="0"/>
+          </a:p>
+        </p:txBody>
+      </p:sp>
+      <p:sp>
+        <p:nvSpPr>
+          <p:cNvPr id="3" name="Text 1"/>
+          <p:cNvSpPr txBox="1"/>
+          <p:nvPr/>
+        </p:nvSpPr>
+        <p:spPr>
+          <a:xfrm>
+            <a:off x="9235440" y="6126480"/>
+            <a:ext cx="2743200" cy="548640"/>
+          </a:xfrm>
+          <a:prstGeom prst="rect">
+            <a:avLst/>
+          </a:prstGeom>
+          <a:noFill/>
+          <a:ln/>
+        </p:spPr>
+        <p:txBody>
+          <a:bodyPr wrap="square" lIns="0" tIns="0" rIns="0" bIns="0" rtlCol="0" anchor="ctr"/>
+          <a:lstStyle/>
+          <a:p>
+            <a:pPr algn="r" indent="0" marL="0">
+              <a:buNone/>
+            </a:pPr>
+            <a:r>
+              <a:rPr lang="en-US" sz="2400" dirty="0">
+                <a:solidFill>
+                  <a:srgbClr val="8A8A8A"/>
+                </a:solidFill>
+                <a:latin typeface="Arial" pitchFamily="34" charset="0"/>
+                <a:ea typeface="Arial" pitchFamily="34" charset="-122"/>
+                <a:cs typeface="Arial" pitchFamily="34" charset="-120"/>
+              </a:rPr>
+              <a:t>○ ○ ● ○</a:t>
+            </a:r>
+            <a:endParaRPr lang="en-US" sz="2400" dirty="0"/>
           </a:p>
         </p:txBody>
       </p:sp>
@@ -2826,7 +2982,7 @@
               <a:buNone/>
             </a:pPr>
             <a:r>
-              <a:rPr lang="en-US" sz="4800" b="1" dirty="0">
+              <a:rPr lang="en-US" sz="5000" b="1" dirty="0">
                 <a:solidFill>
                   <a:srgbClr val="FFFFFF"/>
                 </a:solidFill>
@@ -2836,14 +2992,14 @@
               </a:rPr>
               <a:t>Above all wealth</a:t>
             </a:r>
-            <a:endParaRPr lang="en-US" sz="4800" dirty="0"/>
-          </a:p>
-          <a:p>
-            <a:pPr algn="ctr" indent="0" marL="0">
-              <a:buNone/>
-            </a:pPr>
-            <a:r>
-              <a:rPr lang="en-US" sz="4800" b="1" dirty="0">
+            <a:endParaRPr lang="en-US" sz="5000" dirty="0"/>
+          </a:p>
+          <a:p>
+            <a:pPr algn="ctr" indent="0" marL="0">
+              <a:buNone/>
+            </a:pPr>
+            <a:r>
+              <a:rPr lang="en-US" sz="5000" b="1" dirty="0">
                 <a:solidFill>
                   <a:srgbClr val="FFFFFF"/>
                 </a:solidFill>
@@ -2853,14 +3009,14 @@
               </a:rPr>
               <a:t>and treasures of the earth</a:t>
             </a:r>
-            <a:endParaRPr lang="en-US" sz="4800" dirty="0"/>
-          </a:p>
-          <a:p>
-            <a:pPr algn="ctr" indent="0" marL="0">
-              <a:buNone/>
-            </a:pPr>
-            <a:r>
-              <a:rPr lang="en-US" sz="4800" b="1" dirty="0">
+            <a:endParaRPr lang="en-US" sz="5000" dirty="0"/>
+          </a:p>
+          <a:p>
+            <a:pPr algn="ctr" indent="0" marL="0">
+              <a:buNone/>
+            </a:pPr>
+            <a:r>
+              <a:rPr lang="en-US" sz="5000" b="1" dirty="0">
                 <a:solidFill>
                   <a:srgbClr val="FFFFFF"/>
                 </a:solidFill>
@@ -2870,14 +3026,14 @@
               </a:rPr>
               <a:t>There’s no way to measure</a:t>
             </a:r>
-            <a:endParaRPr lang="en-US" sz="4800" dirty="0"/>
-          </a:p>
-          <a:p>
-            <a:pPr algn="ctr" indent="0" marL="0">
-              <a:buNone/>
-            </a:pPr>
-            <a:r>
-              <a:rPr lang="en-US" sz="4800" b="1" dirty="0">
+            <a:endParaRPr lang="en-US" sz="5000" dirty="0"/>
+          </a:p>
+          <a:p>
+            <a:pPr algn="ctr" indent="0" marL="0">
+              <a:buNone/>
+            </a:pPr>
+            <a:r>
+              <a:rPr lang="en-US" sz="5000" b="1" dirty="0">
                 <a:solidFill>
                   <a:srgbClr val="FFFFFF"/>
                 </a:solidFill>
@@ -2887,7 +3043,46 @@
               </a:rPr>
               <a:t>what You're worth</a:t>
             </a:r>
-            <a:endParaRPr lang="en-US" sz="4800" dirty="0"/>
+            <a:endParaRPr lang="en-US" sz="5000" dirty="0"/>
+          </a:p>
+        </p:txBody>
+      </p:sp>
+      <p:sp>
+        <p:nvSpPr>
+          <p:cNvPr id="3" name="Text 1"/>
+          <p:cNvSpPr txBox="1"/>
+          <p:nvPr/>
+        </p:nvSpPr>
+        <p:spPr>
+          <a:xfrm>
+            <a:off x="9235440" y="6126480"/>
+            <a:ext cx="2743200" cy="548640"/>
+          </a:xfrm>
+          <a:prstGeom prst="rect">
+            <a:avLst/>
+          </a:prstGeom>
+          <a:noFill/>
+          <a:ln/>
+        </p:spPr>
+        <p:txBody>
+          <a:bodyPr wrap="square" lIns="0" tIns="0" rIns="0" bIns="0" rtlCol="0" anchor="ctr"/>
+          <a:lstStyle/>
+          <a:p>
+            <a:pPr algn="r" indent="0" marL="0">
+              <a:buNone/>
+            </a:pPr>
+            <a:r>
+              <a:rPr lang="en-US" sz="2400" dirty="0">
+                <a:solidFill>
+                  <a:srgbClr val="8A8A8A"/>
+                </a:solidFill>
+                <a:latin typeface="Arial" pitchFamily="34" charset="0"/>
+                <a:ea typeface="Arial" pitchFamily="34" charset="-122"/>
+                <a:cs typeface="Arial" pitchFamily="34" charset="-120"/>
+              </a:rPr>
+              <a:t>○ ○ ○ ●</a:t>
+            </a:r>
+            <a:endParaRPr lang="en-US" sz="2400" dirty="0"/>
           </a:p>
         </p:txBody>
       </p:sp>
@@ -2948,7 +3143,7 @@
               <a:buNone/>
             </a:pPr>
             <a:r>
-              <a:rPr lang="en-US" sz="4800" b="1" i="1" dirty="0">
+              <a:rPr lang="en-US" sz="5000" b="1" i="1" dirty="0">
                 <a:solidFill>
                   <a:srgbClr val="FFFFFF"/>
                 </a:solidFill>
@@ -2958,14 +3153,14 @@
               </a:rPr>
               <a:t>Crucified, laid behind the stone</a:t>
             </a:r>
-            <a:endParaRPr lang="en-US" sz="4800" dirty="0"/>
-          </a:p>
-          <a:p>
-            <a:pPr algn="ctr" indent="0" marL="0">
-              <a:buNone/>
-            </a:pPr>
-            <a:r>
-              <a:rPr lang="en-US" sz="4800" b="1" i="1" dirty="0">
+            <a:endParaRPr lang="en-US" sz="5000" dirty="0"/>
+          </a:p>
+          <a:p>
+            <a:pPr algn="ctr" indent="0" marL="0">
+              <a:buNone/>
+            </a:pPr>
+            <a:r>
+              <a:rPr lang="en-US" sz="5000" b="1" i="1" dirty="0">
                 <a:solidFill>
                   <a:srgbClr val="FFFFFF"/>
                 </a:solidFill>
@@ -2975,14 +3170,14 @@
               </a:rPr>
               <a:t>You lived to die, rejected and alone</a:t>
             </a:r>
-            <a:endParaRPr lang="en-US" sz="4800" dirty="0"/>
-          </a:p>
-          <a:p>
-            <a:pPr algn="ctr" indent="0" marL="0">
-              <a:buNone/>
-            </a:pPr>
-            <a:r>
-              <a:rPr lang="en-US" sz="4800" b="1" i="1" dirty="0">
+            <a:endParaRPr lang="en-US" sz="5000" dirty="0"/>
+          </a:p>
+          <a:p>
+            <a:pPr algn="ctr" indent="0" marL="0">
+              <a:buNone/>
+            </a:pPr>
+            <a:r>
+              <a:rPr lang="en-US" sz="5000" b="1" i="1" dirty="0">
                 <a:solidFill>
                   <a:srgbClr val="FFFFFF"/>
                 </a:solidFill>
@@ -2992,14 +3187,14 @@
               </a:rPr>
               <a:t>Like a rose, trampled on the ground</a:t>
             </a:r>
-            <a:endParaRPr lang="en-US" sz="4800" dirty="0"/>
-          </a:p>
-          <a:p>
-            <a:pPr algn="ctr" indent="0" marL="0">
-              <a:buNone/>
-            </a:pPr>
-            <a:r>
-              <a:rPr lang="en-US" sz="4800" b="1" i="1" dirty="0">
+            <a:endParaRPr lang="en-US" sz="5000" dirty="0"/>
+          </a:p>
+          <a:p>
+            <a:pPr algn="ctr" indent="0" marL="0">
+              <a:buNone/>
+            </a:pPr>
+            <a:r>
+              <a:rPr lang="en-US" sz="5000" b="1" i="1" dirty="0">
                 <a:solidFill>
                   <a:srgbClr val="FFFFFF"/>
                 </a:solidFill>
@@ -3009,7 +3204,7 @@
               </a:rPr>
               <a:t>You took the fall, and thought of me above all</a:t>
             </a:r>
-            <a:endParaRPr lang="en-US" sz="4800" dirty="0"/>
+            <a:endParaRPr lang="en-US" sz="5000" dirty="0"/>
           </a:p>
         </p:txBody>
       </p:sp>
@@ -3070,7 +3265,7 @@
               <a:buNone/>
             </a:pPr>
             <a:r>
-              <a:rPr lang="en-US" sz="4800" b="1" dirty="0">
+              <a:rPr lang="en-US" sz="5000" b="1" dirty="0">
                 <a:solidFill>
                   <a:srgbClr val="FFFFFF"/>
                 </a:solidFill>
@@ -3080,14 +3275,14 @@
               </a:rPr>
               <a:t>Above all powers</a:t>
             </a:r>
-            <a:endParaRPr lang="en-US" sz="4800" dirty="0"/>
-          </a:p>
-          <a:p>
-            <a:pPr algn="ctr" indent="0" marL="0">
-              <a:buNone/>
-            </a:pPr>
-            <a:r>
-              <a:rPr lang="en-US" sz="4800" b="1" dirty="0">
+            <a:endParaRPr lang="en-US" sz="5000" dirty="0"/>
+          </a:p>
+          <a:p>
+            <a:pPr algn="ctr" indent="0" marL="0">
+              <a:buNone/>
+            </a:pPr>
+            <a:r>
+              <a:rPr lang="en-US" sz="5000" b="1" dirty="0">
                 <a:solidFill>
                   <a:srgbClr val="FFFFFF"/>
                 </a:solidFill>
@@ -3097,14 +3292,14 @@
               </a:rPr>
               <a:t>above all kings</a:t>
             </a:r>
-            <a:endParaRPr lang="en-US" sz="4800" dirty="0"/>
-          </a:p>
-          <a:p>
-            <a:pPr algn="ctr" indent="0" marL="0">
-              <a:buNone/>
-            </a:pPr>
-            <a:r>
-              <a:rPr lang="en-US" sz="4800" b="1" dirty="0">
+            <a:endParaRPr lang="en-US" sz="5000" dirty="0"/>
+          </a:p>
+          <a:p>
+            <a:pPr algn="ctr" indent="0" marL="0">
+              <a:buNone/>
+            </a:pPr>
+            <a:r>
+              <a:rPr lang="en-US" sz="5000" b="1" dirty="0">
                 <a:solidFill>
                   <a:srgbClr val="FFFFFF"/>
                 </a:solidFill>
@@ -3114,14 +3309,14 @@
               </a:rPr>
               <a:t>Above all nature</a:t>
             </a:r>
-            <a:endParaRPr lang="en-US" sz="4800" dirty="0"/>
-          </a:p>
-          <a:p>
-            <a:pPr algn="ctr" indent="0" marL="0">
-              <a:buNone/>
-            </a:pPr>
-            <a:r>
-              <a:rPr lang="en-US" sz="4800" b="1" dirty="0">
+            <a:endParaRPr lang="en-US" sz="5000" dirty="0"/>
+          </a:p>
+          <a:p>
+            <a:pPr algn="ctr" indent="0" marL="0">
+              <a:buNone/>
+            </a:pPr>
+            <a:r>
+              <a:rPr lang="en-US" sz="5000" b="1" dirty="0">
                 <a:solidFill>
                   <a:srgbClr val="FFFFFF"/>
                 </a:solidFill>
@@ -3131,7 +3326,46 @@
               </a:rPr>
               <a:t>and all created things</a:t>
             </a:r>
-            <a:endParaRPr lang="en-US" sz="4800" dirty="0"/>
+            <a:endParaRPr lang="en-US" sz="5000" dirty="0"/>
+          </a:p>
+        </p:txBody>
+      </p:sp>
+      <p:sp>
+        <p:nvSpPr>
+          <p:cNvPr id="3" name="Text 1"/>
+          <p:cNvSpPr txBox="1"/>
+          <p:nvPr/>
+        </p:nvSpPr>
+        <p:spPr>
+          <a:xfrm>
+            <a:off x="9235440" y="6126480"/>
+            <a:ext cx="2743200" cy="548640"/>
+          </a:xfrm>
+          <a:prstGeom prst="rect">
+            <a:avLst/>
+          </a:prstGeom>
+          <a:noFill/>
+          <a:ln/>
+        </p:spPr>
+        <p:txBody>
+          <a:bodyPr wrap="square" lIns="0" tIns="0" rIns="0" bIns="0" rtlCol="0" anchor="ctr"/>
+          <a:lstStyle/>
+          <a:p>
+            <a:pPr algn="r" indent="0" marL="0">
+              <a:buNone/>
+            </a:pPr>
+            <a:r>
+              <a:rPr lang="en-US" sz="2400" dirty="0">
+                <a:solidFill>
+                  <a:srgbClr val="8A8A8A"/>
+                </a:solidFill>
+                <a:latin typeface="Arial" pitchFamily="34" charset="0"/>
+                <a:ea typeface="Arial" pitchFamily="34" charset="-122"/>
+                <a:cs typeface="Arial" pitchFamily="34" charset="-120"/>
+              </a:rPr>
+              <a:t>● ○ ○ ○</a:t>
+            </a:r>
+            <a:endParaRPr lang="en-US" sz="2400" dirty="0"/>
           </a:p>
         </p:txBody>
       </p:sp>
@@ -3192,7 +3426,7 @@
               <a:buNone/>
             </a:pPr>
             <a:r>
-              <a:rPr lang="en-US" sz="4800" b="1" dirty="0">
+              <a:rPr lang="en-US" sz="5000" b="1" dirty="0">
                 <a:solidFill>
                   <a:srgbClr val="FFFFFF"/>
                 </a:solidFill>
@@ -3202,14 +3436,14 @@
               </a:rPr>
               <a:t>Above all wisdom</a:t>
             </a:r>
-            <a:endParaRPr lang="en-US" sz="4800" dirty="0"/>
-          </a:p>
-          <a:p>
-            <a:pPr algn="ctr" indent="0" marL="0">
-              <a:buNone/>
-            </a:pPr>
-            <a:r>
-              <a:rPr lang="en-US" sz="4800" b="1" dirty="0">
+            <a:endParaRPr lang="en-US" sz="5000" dirty="0"/>
+          </a:p>
+          <a:p>
+            <a:pPr algn="ctr" indent="0" marL="0">
+              <a:buNone/>
+            </a:pPr>
+            <a:r>
+              <a:rPr lang="en-US" sz="5000" b="1" dirty="0">
                 <a:solidFill>
                   <a:srgbClr val="FFFFFF"/>
                 </a:solidFill>
@@ -3219,14 +3453,14 @@
               </a:rPr>
               <a:t>and all the ways of man</a:t>
             </a:r>
-            <a:endParaRPr lang="en-US" sz="4800" dirty="0"/>
-          </a:p>
-          <a:p>
-            <a:pPr algn="ctr" indent="0" marL="0">
-              <a:buNone/>
-            </a:pPr>
-            <a:r>
-              <a:rPr lang="en-US" sz="4800" b="1" dirty="0">
+            <a:endParaRPr lang="en-US" sz="5000" dirty="0"/>
+          </a:p>
+          <a:p>
+            <a:pPr algn="ctr" indent="0" marL="0">
+              <a:buNone/>
+            </a:pPr>
+            <a:r>
+              <a:rPr lang="en-US" sz="5000" b="1" dirty="0">
                 <a:solidFill>
                   <a:srgbClr val="FFFFFF"/>
                 </a:solidFill>
@@ -3236,14 +3470,14 @@
               </a:rPr>
               <a:t>You were here</a:t>
             </a:r>
-            <a:endParaRPr lang="en-US" sz="4800" dirty="0"/>
-          </a:p>
-          <a:p>
-            <a:pPr algn="ctr" indent="0" marL="0">
-              <a:buNone/>
-            </a:pPr>
-            <a:r>
-              <a:rPr lang="en-US" sz="4800" b="1" dirty="0">
+            <a:endParaRPr lang="en-US" sz="5000" dirty="0"/>
+          </a:p>
+          <a:p>
+            <a:pPr algn="ctr" indent="0" marL="0">
+              <a:buNone/>
+            </a:pPr>
+            <a:r>
+              <a:rPr lang="en-US" sz="5000" b="1" dirty="0">
                 <a:solidFill>
                   <a:srgbClr val="FFFFFF"/>
                 </a:solidFill>
@@ -3253,7 +3487,46 @@
               </a:rPr>
               <a:t>before the world began</a:t>
             </a:r>
-            <a:endParaRPr lang="en-US" sz="4800" dirty="0"/>
+            <a:endParaRPr lang="en-US" sz="5000" dirty="0"/>
+          </a:p>
+        </p:txBody>
+      </p:sp>
+      <p:sp>
+        <p:nvSpPr>
+          <p:cNvPr id="3" name="Text 1"/>
+          <p:cNvSpPr txBox="1"/>
+          <p:nvPr/>
+        </p:nvSpPr>
+        <p:spPr>
+          <a:xfrm>
+            <a:off x="9235440" y="6126480"/>
+            <a:ext cx="2743200" cy="548640"/>
+          </a:xfrm>
+          <a:prstGeom prst="rect">
+            <a:avLst/>
+          </a:prstGeom>
+          <a:noFill/>
+          <a:ln/>
+        </p:spPr>
+        <p:txBody>
+          <a:bodyPr wrap="square" lIns="0" tIns="0" rIns="0" bIns="0" rtlCol="0" anchor="ctr"/>
+          <a:lstStyle/>
+          <a:p>
+            <a:pPr algn="r" indent="0" marL="0">
+              <a:buNone/>
+            </a:pPr>
+            <a:r>
+              <a:rPr lang="en-US" sz="2400" dirty="0">
+                <a:solidFill>
+                  <a:srgbClr val="8A8A8A"/>
+                </a:solidFill>
+                <a:latin typeface="Arial" pitchFamily="34" charset="0"/>
+                <a:ea typeface="Arial" pitchFamily="34" charset="-122"/>
+                <a:cs typeface="Arial" pitchFamily="34" charset="-120"/>
+              </a:rPr>
+              <a:t>○ ● ○ ○</a:t>
+            </a:r>
+            <a:endParaRPr lang="en-US" sz="2400" dirty="0"/>
           </a:p>
         </p:txBody>
       </p:sp>
@@ -3314,7 +3587,7 @@
               <a:buNone/>
             </a:pPr>
             <a:r>
-              <a:rPr lang="en-US" sz="4800" b="1" dirty="0">
+              <a:rPr lang="en-US" sz="5000" b="1" dirty="0">
                 <a:solidFill>
                   <a:srgbClr val="FFFFFF"/>
                 </a:solidFill>
@@ -3324,14 +3597,14 @@
               </a:rPr>
               <a:t>Above all kingdoms</a:t>
             </a:r>
-            <a:endParaRPr lang="en-US" sz="4800" dirty="0"/>
-          </a:p>
-          <a:p>
-            <a:pPr algn="ctr" indent="0" marL="0">
-              <a:buNone/>
-            </a:pPr>
-            <a:r>
-              <a:rPr lang="en-US" sz="4800" b="1" dirty="0">
+            <a:endParaRPr lang="en-US" sz="5000" dirty="0"/>
+          </a:p>
+          <a:p>
+            <a:pPr algn="ctr" indent="0" marL="0">
+              <a:buNone/>
+            </a:pPr>
+            <a:r>
+              <a:rPr lang="en-US" sz="5000" b="1" dirty="0">
                 <a:solidFill>
                   <a:srgbClr val="FFFFFF"/>
                 </a:solidFill>
@@ -3341,14 +3614,14 @@
               </a:rPr>
               <a:t>above all thrones</a:t>
             </a:r>
-            <a:endParaRPr lang="en-US" sz="4800" dirty="0"/>
-          </a:p>
-          <a:p>
-            <a:pPr algn="ctr" indent="0" marL="0">
-              <a:buNone/>
-            </a:pPr>
-            <a:r>
-              <a:rPr lang="en-US" sz="4800" b="1" dirty="0">
+            <a:endParaRPr lang="en-US" sz="5000" dirty="0"/>
+          </a:p>
+          <a:p>
+            <a:pPr algn="ctr" indent="0" marL="0">
+              <a:buNone/>
+            </a:pPr>
+            <a:r>
+              <a:rPr lang="en-US" sz="5000" b="1" dirty="0">
                 <a:solidFill>
                   <a:srgbClr val="FFFFFF"/>
                 </a:solidFill>
@@ -3358,14 +3631,14 @@
               </a:rPr>
               <a:t>Above all wonders</a:t>
             </a:r>
-            <a:endParaRPr lang="en-US" sz="4800" dirty="0"/>
-          </a:p>
-          <a:p>
-            <a:pPr algn="ctr" indent="0" marL="0">
-              <a:buNone/>
-            </a:pPr>
-            <a:r>
-              <a:rPr lang="en-US" sz="4800" b="1" dirty="0">
+            <a:endParaRPr lang="en-US" sz="5000" dirty="0"/>
+          </a:p>
+          <a:p>
+            <a:pPr algn="ctr" indent="0" marL="0">
+              <a:buNone/>
+            </a:pPr>
+            <a:r>
+              <a:rPr lang="en-US" sz="5000" b="1" dirty="0">
                 <a:solidFill>
                   <a:srgbClr val="FFFFFF"/>
                 </a:solidFill>
@@ -3375,7 +3648,46 @@
               </a:rPr>
               <a:t>the world has ever known</a:t>
             </a:r>
-            <a:endParaRPr lang="en-US" sz="4800" dirty="0"/>
+            <a:endParaRPr lang="en-US" sz="5000" dirty="0"/>
+          </a:p>
+        </p:txBody>
+      </p:sp>
+      <p:sp>
+        <p:nvSpPr>
+          <p:cNvPr id="3" name="Text 1"/>
+          <p:cNvSpPr txBox="1"/>
+          <p:nvPr/>
+        </p:nvSpPr>
+        <p:spPr>
+          <a:xfrm>
+            <a:off x="9235440" y="6126480"/>
+            <a:ext cx="2743200" cy="548640"/>
+          </a:xfrm>
+          <a:prstGeom prst="rect">
+            <a:avLst/>
+          </a:prstGeom>
+          <a:noFill/>
+          <a:ln/>
+        </p:spPr>
+        <p:txBody>
+          <a:bodyPr wrap="square" lIns="0" tIns="0" rIns="0" bIns="0" rtlCol="0" anchor="ctr"/>
+          <a:lstStyle/>
+          <a:p>
+            <a:pPr algn="r" indent="0" marL="0">
+              <a:buNone/>
+            </a:pPr>
+            <a:r>
+              <a:rPr lang="en-US" sz="2400" dirty="0">
+                <a:solidFill>
+                  <a:srgbClr val="8A8A8A"/>
+                </a:solidFill>
+                <a:latin typeface="Arial" pitchFamily="34" charset="0"/>
+                <a:ea typeface="Arial" pitchFamily="34" charset="-122"/>
+                <a:cs typeface="Arial" pitchFamily="34" charset="-120"/>
+              </a:rPr>
+              <a:t>○ ○ ● ○</a:t>
+            </a:r>
+            <a:endParaRPr lang="en-US" sz="2400" dirty="0"/>
           </a:p>
         </p:txBody>
       </p:sp>

--- a/fubc-en/2-Above All Powers.pptx
+++ b/fubc-en/2-Above All Powers.pptx
@@ -2200,7 +2200,7 @@
               <a:buNone/>
             </a:pPr>
             <a:r>
-              <a:rPr lang="en-US" sz="5000" b="1" i="1" dirty="0">
+              <a:rPr lang="en-US" sz="4700" b="1" i="1" dirty="0">
                 <a:solidFill>
                   <a:srgbClr val="FFFFFF"/>
                 </a:solidFill>
@@ -2210,14 +2210,14 @@
               </a:rPr>
               <a:t>Crucified, laid behind the stone</a:t>
             </a:r>
-            <a:endParaRPr lang="en-US" sz="5000" dirty="0"/>
-          </a:p>
-          <a:p>
-            <a:pPr algn="ctr" indent="0" marL="0">
-              <a:buNone/>
-            </a:pPr>
-            <a:r>
-              <a:rPr lang="en-US" sz="5000" b="1" i="1" dirty="0">
+            <a:endParaRPr lang="en-US" sz="4700" dirty="0"/>
+          </a:p>
+          <a:p>
+            <a:pPr algn="ctr" indent="0" marL="0">
+              <a:buNone/>
+            </a:pPr>
+            <a:r>
+              <a:rPr lang="en-US" sz="4700" b="1" i="1" dirty="0">
                 <a:solidFill>
                   <a:srgbClr val="FFFFFF"/>
                 </a:solidFill>
@@ -2227,14 +2227,14 @@
               </a:rPr>
               <a:t>You lived to die, rejected and alone</a:t>
             </a:r>
-            <a:endParaRPr lang="en-US" sz="5000" dirty="0"/>
-          </a:p>
-          <a:p>
-            <a:pPr algn="ctr" indent="0" marL="0">
-              <a:buNone/>
-            </a:pPr>
-            <a:r>
-              <a:rPr lang="en-US" sz="5000" b="1" i="1" dirty="0">
+            <a:endParaRPr lang="en-US" sz="4700" dirty="0"/>
+          </a:p>
+          <a:p>
+            <a:pPr algn="ctr" indent="0" marL="0">
+              <a:buNone/>
+            </a:pPr>
+            <a:r>
+              <a:rPr lang="en-US" sz="4700" b="1" i="1" dirty="0">
                 <a:solidFill>
                   <a:srgbClr val="FFFFFF"/>
                 </a:solidFill>
@@ -2244,24 +2244,41 @@
               </a:rPr>
               <a:t>Like a rose, trampled on the ground</a:t>
             </a:r>
-            <a:endParaRPr lang="en-US" sz="5000" dirty="0"/>
-          </a:p>
-          <a:p>
-            <a:pPr algn="ctr" indent="0" marL="0">
-              <a:buNone/>
-            </a:pPr>
-            <a:r>
-              <a:rPr lang="en-US" sz="5000" b="1" i="1" dirty="0">
-                <a:solidFill>
-                  <a:srgbClr val="FFFFFF"/>
-                </a:solidFill>
-                <a:latin typeface="Arial" pitchFamily="34" charset="0"/>
-                <a:ea typeface="Arial" pitchFamily="34" charset="-122"/>
-                <a:cs typeface="Arial" pitchFamily="34" charset="-120"/>
-              </a:rPr>
-              <a:t>You took the fall, and thought of me above all</a:t>
-            </a:r>
-            <a:endParaRPr lang="en-US" sz="5000" dirty="0"/>
+            <a:endParaRPr lang="en-US" sz="4700" dirty="0"/>
+          </a:p>
+          <a:p>
+            <a:pPr algn="ctr" indent="0" marL="0">
+              <a:buNone/>
+            </a:pPr>
+            <a:r>
+              <a:rPr lang="en-US" sz="4700" b="1" i="1" dirty="0">
+                <a:solidFill>
+                  <a:srgbClr val="FFFFFF"/>
+                </a:solidFill>
+                <a:latin typeface="Arial" pitchFamily="34" charset="0"/>
+                <a:ea typeface="Arial" pitchFamily="34" charset="-122"/>
+                <a:cs typeface="Arial" pitchFamily="34" charset="-120"/>
+              </a:rPr>
+              <a:t>You took the fall, </a:t>
+            </a:r>
+            <a:endParaRPr lang="en-US" sz="4700" dirty="0"/>
+          </a:p>
+          <a:p>
+            <a:pPr algn="ctr" indent="0" marL="0">
+              <a:buNone/>
+            </a:pPr>
+            <a:r>
+              <a:rPr lang="en-US" sz="4700" b="1" i="1" dirty="0">
+                <a:solidFill>
+                  <a:srgbClr val="FFFFFF"/>
+                </a:solidFill>
+                <a:latin typeface="Arial" pitchFamily="34" charset="0"/>
+                <a:ea typeface="Arial" pitchFamily="34" charset="-122"/>
+                <a:cs typeface="Arial" pitchFamily="34" charset="-120"/>
+              </a:rPr>
+              <a:t>and thought of me above all</a:t>
+            </a:r>
+            <a:endParaRPr lang="en-US" sz="4700" dirty="0"/>
           </a:p>
         </p:txBody>
       </p:sp>
@@ -2322,7 +2339,7 @@
               <a:buNone/>
             </a:pPr>
             <a:r>
-              <a:rPr lang="en-US" sz="5000" b="1" i="1" dirty="0">
+              <a:rPr lang="en-US" sz="4700" b="1" i="1" dirty="0">
                 <a:solidFill>
                   <a:srgbClr val="FFFFFF"/>
                 </a:solidFill>
@@ -2332,14 +2349,14 @@
               </a:rPr>
               <a:t>Crucified, laid behind the stone</a:t>
             </a:r>
-            <a:endParaRPr lang="en-US" sz="5000" dirty="0"/>
-          </a:p>
-          <a:p>
-            <a:pPr algn="ctr" indent="0" marL="0">
-              <a:buNone/>
-            </a:pPr>
-            <a:r>
-              <a:rPr lang="en-US" sz="5000" b="1" i="1" dirty="0">
+            <a:endParaRPr lang="en-US" sz="4700" dirty="0"/>
+          </a:p>
+          <a:p>
+            <a:pPr algn="ctr" indent="0" marL="0">
+              <a:buNone/>
+            </a:pPr>
+            <a:r>
+              <a:rPr lang="en-US" sz="4700" b="1" i="1" dirty="0">
                 <a:solidFill>
                   <a:srgbClr val="FFFFFF"/>
                 </a:solidFill>
@@ -2349,14 +2366,14 @@
               </a:rPr>
               <a:t>You lived to die, rejected and alone</a:t>
             </a:r>
-            <a:endParaRPr lang="en-US" sz="5000" dirty="0"/>
-          </a:p>
-          <a:p>
-            <a:pPr algn="ctr" indent="0" marL="0">
-              <a:buNone/>
-            </a:pPr>
-            <a:r>
-              <a:rPr lang="en-US" sz="5000" b="1" i="1" dirty="0">
+            <a:endParaRPr lang="en-US" sz="4700" dirty="0"/>
+          </a:p>
+          <a:p>
+            <a:pPr algn="ctr" indent="0" marL="0">
+              <a:buNone/>
+            </a:pPr>
+            <a:r>
+              <a:rPr lang="en-US" sz="4700" b="1" i="1" dirty="0">
                 <a:solidFill>
                   <a:srgbClr val="FFFFFF"/>
                 </a:solidFill>
@@ -2366,37 +2383,54 @@
               </a:rPr>
               <a:t>Like a rose, trampled on the ground</a:t>
             </a:r>
-            <a:endParaRPr lang="en-US" sz="5000" dirty="0"/>
-          </a:p>
-          <a:p>
-            <a:pPr algn="ctr" indent="0" marL="0">
-              <a:buNone/>
-            </a:pPr>
-            <a:r>
-              <a:rPr lang="en-US" sz="5000" b="1" i="1" dirty="0">
-                <a:solidFill>
-                  <a:srgbClr val="FFFFFF"/>
-                </a:solidFill>
-                <a:latin typeface="Arial" pitchFamily="34" charset="0"/>
-                <a:ea typeface="Arial" pitchFamily="34" charset="-122"/>
-                <a:cs typeface="Arial" pitchFamily="34" charset="-120"/>
-              </a:rPr>
-              <a:t>You took the fall, and thought of me above all</a:t>
-            </a:r>
-            <a:endParaRPr lang="en-US" sz="5000" dirty="0"/>
-          </a:p>
-          <a:p>
-            <a:pPr algn="ctr" indent="0" marL="0">
-              <a:buNone/>
-            </a:pPr>
-            <a:endParaRPr lang="en-US" sz="5000" dirty="0"/>
-          </a:p>
-          <a:p>
-            <a:pPr algn="ctr" indent="0" marL="0">
-              <a:buNone/>
-            </a:pPr>
-            <a:r>
-              <a:rPr lang="en-US" sz="5000" b="1" i="1" dirty="0">
+            <a:endParaRPr lang="en-US" sz="4700" dirty="0"/>
+          </a:p>
+          <a:p>
+            <a:pPr algn="ctr" indent="0" marL="0">
+              <a:buNone/>
+            </a:pPr>
+            <a:r>
+              <a:rPr lang="en-US" sz="4700" b="1" i="1" dirty="0">
+                <a:solidFill>
+                  <a:srgbClr val="FFFFFF"/>
+                </a:solidFill>
+                <a:latin typeface="Arial" pitchFamily="34" charset="0"/>
+                <a:ea typeface="Arial" pitchFamily="34" charset="-122"/>
+                <a:cs typeface="Arial" pitchFamily="34" charset="-120"/>
+              </a:rPr>
+              <a:t>You took the fall, </a:t>
+            </a:r>
+            <a:endParaRPr lang="en-US" sz="4700" dirty="0"/>
+          </a:p>
+          <a:p>
+            <a:pPr algn="ctr" indent="0" marL="0">
+              <a:buNone/>
+            </a:pPr>
+            <a:r>
+              <a:rPr lang="en-US" sz="4700" b="1" i="1" dirty="0">
+                <a:solidFill>
+                  <a:srgbClr val="FFFFFF"/>
+                </a:solidFill>
+                <a:latin typeface="Arial" pitchFamily="34" charset="0"/>
+                <a:ea typeface="Arial" pitchFamily="34" charset="-122"/>
+                <a:cs typeface="Arial" pitchFamily="34" charset="-120"/>
+              </a:rPr>
+              <a:t>and thought of me above all</a:t>
+            </a:r>
+            <a:endParaRPr lang="en-US" sz="4700" dirty="0"/>
+          </a:p>
+          <a:p>
+            <a:pPr algn="ctr" indent="0" marL="0">
+              <a:buNone/>
+            </a:pPr>
+            <a:endParaRPr lang="en-US" sz="4700" dirty="0"/>
+          </a:p>
+          <a:p>
+            <a:pPr algn="ctr" indent="0" marL="0">
+              <a:buNone/>
+            </a:pPr>
+            <a:r>
+              <a:rPr lang="en-US" sz="4700" b="1" i="1" dirty="0">
                 <a:solidFill>
                   <a:srgbClr val="FFFFFF"/>
                 </a:solidFill>
@@ -2406,7 +2440,7 @@
               </a:rPr>
               <a:t>***</a:t>
             </a:r>
-            <a:endParaRPr lang="en-US" sz="5000" dirty="0"/>
+            <a:endParaRPr lang="en-US" sz="4700" dirty="0"/>
           </a:p>
         </p:txBody>
       </p:sp>
@@ -3143,7 +3177,7 @@
               <a:buNone/>
             </a:pPr>
             <a:r>
-              <a:rPr lang="en-US" sz="5000" b="1" i="1" dirty="0">
+              <a:rPr lang="en-US" sz="4700" b="1" i="1" dirty="0">
                 <a:solidFill>
                   <a:srgbClr val="FFFFFF"/>
                 </a:solidFill>
@@ -3153,14 +3187,14 @@
               </a:rPr>
               <a:t>Crucified, laid behind the stone</a:t>
             </a:r>
-            <a:endParaRPr lang="en-US" sz="5000" dirty="0"/>
-          </a:p>
-          <a:p>
-            <a:pPr algn="ctr" indent="0" marL="0">
-              <a:buNone/>
-            </a:pPr>
-            <a:r>
-              <a:rPr lang="en-US" sz="5000" b="1" i="1" dirty="0">
+            <a:endParaRPr lang="en-US" sz="4700" dirty="0"/>
+          </a:p>
+          <a:p>
+            <a:pPr algn="ctr" indent="0" marL="0">
+              <a:buNone/>
+            </a:pPr>
+            <a:r>
+              <a:rPr lang="en-US" sz="4700" b="1" i="1" dirty="0">
                 <a:solidFill>
                   <a:srgbClr val="FFFFFF"/>
                 </a:solidFill>
@@ -3170,14 +3204,14 @@
               </a:rPr>
               <a:t>You lived to die, rejected and alone</a:t>
             </a:r>
-            <a:endParaRPr lang="en-US" sz="5000" dirty="0"/>
-          </a:p>
-          <a:p>
-            <a:pPr algn="ctr" indent="0" marL="0">
-              <a:buNone/>
-            </a:pPr>
-            <a:r>
-              <a:rPr lang="en-US" sz="5000" b="1" i="1" dirty="0">
+            <a:endParaRPr lang="en-US" sz="4700" dirty="0"/>
+          </a:p>
+          <a:p>
+            <a:pPr algn="ctr" indent="0" marL="0">
+              <a:buNone/>
+            </a:pPr>
+            <a:r>
+              <a:rPr lang="en-US" sz="4700" b="1" i="1" dirty="0">
                 <a:solidFill>
                   <a:srgbClr val="FFFFFF"/>
                 </a:solidFill>
@@ -3187,24 +3221,41 @@
               </a:rPr>
               <a:t>Like a rose, trampled on the ground</a:t>
             </a:r>
-            <a:endParaRPr lang="en-US" sz="5000" dirty="0"/>
-          </a:p>
-          <a:p>
-            <a:pPr algn="ctr" indent="0" marL="0">
-              <a:buNone/>
-            </a:pPr>
-            <a:r>
-              <a:rPr lang="en-US" sz="5000" b="1" i="1" dirty="0">
-                <a:solidFill>
-                  <a:srgbClr val="FFFFFF"/>
-                </a:solidFill>
-                <a:latin typeface="Arial" pitchFamily="34" charset="0"/>
-                <a:ea typeface="Arial" pitchFamily="34" charset="-122"/>
-                <a:cs typeface="Arial" pitchFamily="34" charset="-120"/>
-              </a:rPr>
-              <a:t>You took the fall, and thought of me above all</a:t>
-            </a:r>
-            <a:endParaRPr lang="en-US" sz="5000" dirty="0"/>
+            <a:endParaRPr lang="en-US" sz="4700" dirty="0"/>
+          </a:p>
+          <a:p>
+            <a:pPr algn="ctr" indent="0" marL="0">
+              <a:buNone/>
+            </a:pPr>
+            <a:r>
+              <a:rPr lang="en-US" sz="4700" b="1" i="1" dirty="0">
+                <a:solidFill>
+                  <a:srgbClr val="FFFFFF"/>
+                </a:solidFill>
+                <a:latin typeface="Arial" pitchFamily="34" charset="0"/>
+                <a:ea typeface="Arial" pitchFamily="34" charset="-122"/>
+                <a:cs typeface="Arial" pitchFamily="34" charset="-120"/>
+              </a:rPr>
+              <a:t>You took the fall, </a:t>
+            </a:r>
+            <a:endParaRPr lang="en-US" sz="4700" dirty="0"/>
+          </a:p>
+          <a:p>
+            <a:pPr algn="ctr" indent="0" marL="0">
+              <a:buNone/>
+            </a:pPr>
+            <a:r>
+              <a:rPr lang="en-US" sz="4700" b="1" i="1" dirty="0">
+                <a:solidFill>
+                  <a:srgbClr val="FFFFFF"/>
+                </a:solidFill>
+                <a:latin typeface="Arial" pitchFamily="34" charset="0"/>
+                <a:ea typeface="Arial" pitchFamily="34" charset="-122"/>
+                <a:cs typeface="Arial" pitchFamily="34" charset="-120"/>
+              </a:rPr>
+              <a:t>and thought of me above all</a:t>
+            </a:r>
+            <a:endParaRPr lang="en-US" sz="4700" dirty="0"/>
           </a:p>
         </p:txBody>
       </p:sp>
